--- a/attach/UWM/UWM_PH702_2026Fall_Part03.pptx
+++ b/attach/UWM/UWM_PH702_2026Fall_Part03.pptx
@@ -5,10 +5,10 @@
     <p:sldMasterId id="2147483660" r:id="rId1"/>
   </p:sldMasterIdLst>
   <p:notesMasterIdLst>
-    <p:notesMasterId r:id="rId25"/>
+    <p:notesMasterId r:id="rId24"/>
   </p:notesMasterIdLst>
   <p:handoutMasterIdLst>
-    <p:handoutMasterId r:id="rId26"/>
+    <p:handoutMasterId r:id="rId25"/>
   </p:handoutMasterIdLst>
   <p:sldIdLst>
     <p:sldId id="314" r:id="rId2"/>
@@ -32,8 +32,7 @@
     <p:sldId id="361" r:id="rId20"/>
     <p:sldId id="362" r:id="rId21"/>
     <p:sldId id="364" r:id="rId22"/>
-    <p:sldId id="366" r:id="rId23"/>
-    <p:sldId id="316" r:id="rId24"/>
+    <p:sldId id="316" r:id="rId23"/>
   </p:sldIdLst>
   <p:sldSz cx="9144000" cy="6858000" type="screen4x3"/>
   <p:notesSz cx="6858000" cy="9144000"/>
@@ -187,7 +186,7 @@
 <file path=ppt/revisionInfo.xml><?xml version="1.0" encoding="utf-8"?>
 <p1510:revInfo xmlns:a="http://schemas.openxmlformats.org/drawingml/2006/main" xmlns:r="http://schemas.openxmlformats.org/officeDocument/2006/relationships" xmlns:p1510="http://schemas.microsoft.com/office/powerpoint/2015/10/main">
   <p1510:revLst>
-    <p1510:client id="{E51C032D-D87D-483B-A30A-05CA9815312A}" v="2180" dt="2026-09-23T01:56:40.963"/>
+    <p1510:client id="{E51C032D-D87D-483B-A30A-05CA9815312A}" v="2369" dt="2026-09-29T03:35:46.947"/>
   </p1510:revLst>
 </p1510:revInfo>
 </file>
@@ -197,7 +196,7 @@
   <pc:docChgLst>
     <pc:chgData name="Zhiyang Zhou" userId="715b216a-9552-4d73-a9aa-1ef002111b6f" providerId="ADAL" clId="{2B661EA1-28DD-4C7A-9BAA-1E2E41397E83}"/>
     <pc:docChg chg="undo custSel delSld modSld">
-      <pc:chgData name="Zhiyang Zhou" userId="715b216a-9552-4d73-a9aa-1ef002111b6f" providerId="ADAL" clId="{2B661EA1-28DD-4C7A-9BAA-1E2E41397E83}" dt="2026-09-23T01:58:18.879" v="3367" actId="20577"/>
+      <pc:chgData name="Zhiyang Zhou" userId="715b216a-9552-4d73-a9aa-1ef002111b6f" providerId="ADAL" clId="{2B661EA1-28DD-4C7A-9BAA-1E2E41397E83}" dt="2026-09-29T03:36:13.246" v="3669" actId="2696"/>
       <pc:docMkLst>
         <pc:docMk/>
       </pc:docMkLst>
@@ -292,14 +291,6 @@
             <ac:spMk id="45063" creationId="{00000000-0000-0000-0000-000000000000}"/>
           </ac:spMkLst>
         </pc:spChg>
-        <pc:spChg chg="del mod">
-          <ac:chgData name="Zhiyang Zhou" userId="715b216a-9552-4d73-a9aa-1ef002111b6f" providerId="ADAL" clId="{2B661EA1-28DD-4C7A-9BAA-1E2E41397E83}" dt="2026-09-22T22:19:35.905" v="274" actId="478"/>
-          <ac:spMkLst>
-            <pc:docMk/>
-            <pc:sldMk cId="0" sldId="330"/>
-            <ac:spMk id="462853" creationId="{00000000-0000-0000-0000-000000000000}"/>
-          </ac:spMkLst>
-        </pc:spChg>
         <pc:spChg chg="mod">
           <ac:chgData name="Zhiyang Zhou" userId="715b216a-9552-4d73-a9aa-1ef002111b6f" providerId="ADAL" clId="{2B661EA1-28DD-4C7A-9BAA-1E2E41397E83}" dt="2026-09-22T22:19:48.232" v="328" actId="1035"/>
           <ac:spMkLst>
@@ -310,7 +301,7 @@
         </pc:spChg>
       </pc:sldChg>
       <pc:sldChg chg="addSp delSp modSp mod">
-        <pc:chgData name="Zhiyang Zhou" userId="715b216a-9552-4d73-a9aa-1ef002111b6f" providerId="ADAL" clId="{2B661EA1-28DD-4C7A-9BAA-1E2E41397E83}" dt="2026-09-22T23:23:34.715" v="1563" actId="20577"/>
+        <pc:chgData name="Zhiyang Zhou" userId="715b216a-9552-4d73-a9aa-1ef002111b6f" providerId="ADAL" clId="{2B661EA1-28DD-4C7A-9BAA-1E2E41397E83}" dt="2026-09-29T02:42:33.863" v="3555" actId="20577"/>
         <pc:sldMkLst>
           <pc:docMk/>
           <pc:sldMk cId="0" sldId="331"/>
@@ -323,22 +314,6 @@
             <ac:spMk id="3" creationId="{00000000-0000-0000-0000-000000000000}"/>
           </ac:spMkLst>
         </pc:spChg>
-        <pc:spChg chg="add del mod">
-          <ac:chgData name="Zhiyang Zhou" userId="715b216a-9552-4d73-a9aa-1ef002111b6f" providerId="ADAL" clId="{2B661EA1-28DD-4C7A-9BAA-1E2E41397E83}" dt="2026-09-22T23:01:02.890" v="803" actId="21"/>
-          <ac:spMkLst>
-            <pc:docMk/>
-            <pc:sldMk cId="0" sldId="331"/>
-            <ac:spMk id="5" creationId="{4C38DF49-0BA4-3C3D-956B-4BF6AE4AFBDD}"/>
-          </ac:spMkLst>
-        </pc:spChg>
-        <pc:spChg chg="add del mod">
-          <ac:chgData name="Zhiyang Zhou" userId="715b216a-9552-4d73-a9aa-1ef002111b6f" providerId="ADAL" clId="{2B661EA1-28DD-4C7A-9BAA-1E2E41397E83}" dt="2026-09-22T23:01:08.217" v="806" actId="478"/>
-          <ac:spMkLst>
-            <pc:docMk/>
-            <pc:sldMk cId="0" sldId="331"/>
-            <ac:spMk id="7" creationId="{0BA165F6-E71B-820D-3659-ECF9E7E1A29A}"/>
-          </ac:spMkLst>
-        </pc:spChg>
         <pc:spChg chg="add mod">
           <ac:chgData name="Zhiyang Zhou" userId="715b216a-9552-4d73-a9aa-1ef002111b6f" providerId="ADAL" clId="{2B661EA1-28DD-4C7A-9BAA-1E2E41397E83}" dt="2026-09-22T23:15:43.606" v="1469" actId="20577"/>
           <ac:spMkLst>
@@ -348,23 +323,15 @@
           </ac:spMkLst>
         </pc:spChg>
         <pc:spChg chg="mod">
-          <ac:chgData name="Zhiyang Zhou" userId="715b216a-9552-4d73-a9aa-1ef002111b6f" providerId="ADAL" clId="{2B661EA1-28DD-4C7A-9BAA-1E2E41397E83}" dt="2026-09-22T23:23:34.715" v="1563" actId="20577"/>
+          <ac:chgData name="Zhiyang Zhou" userId="715b216a-9552-4d73-a9aa-1ef002111b6f" providerId="ADAL" clId="{2B661EA1-28DD-4C7A-9BAA-1E2E41397E83}" dt="2026-09-29T02:42:33.863" v="3555" actId="20577"/>
           <ac:spMkLst>
             <pc:docMk/>
             <pc:sldMk cId="0" sldId="331"/>
             <ac:spMk id="45063" creationId="{00000000-0000-0000-0000-000000000000}"/>
           </ac:spMkLst>
         </pc:spChg>
-        <pc:spChg chg="del mod">
-          <ac:chgData name="Zhiyang Zhou" userId="715b216a-9552-4d73-a9aa-1ef002111b6f" providerId="ADAL" clId="{2B661EA1-28DD-4C7A-9BAA-1E2E41397E83}" dt="2026-09-22T22:59:35.225" v="612" actId="478"/>
-          <ac:spMkLst>
-            <pc:docMk/>
-            <pc:sldMk cId="0" sldId="331"/>
-            <ac:spMk id="46083" creationId="{00000000-0000-0000-0000-000000000000}"/>
-          </ac:spMkLst>
-        </pc:spChg>
         <pc:grpChg chg="mod">
-          <ac:chgData name="Zhiyang Zhou" userId="715b216a-9552-4d73-a9aa-1ef002111b6f" providerId="ADAL" clId="{2B661EA1-28DD-4C7A-9BAA-1E2E41397E83}" dt="2026-09-22T23:11:43.560" v="1371" actId="1036"/>
+          <ac:chgData name="Zhiyang Zhou" userId="715b216a-9552-4d73-a9aa-1ef002111b6f" providerId="ADAL" clId="{2B661EA1-28DD-4C7A-9BAA-1E2E41397E83}" dt="2026-09-29T02:42:20.463" v="3544" actId="20577"/>
           <ac:grpSpMkLst>
             <pc:docMk/>
             <pc:sldMk cId="0" sldId="331"/>
@@ -396,7 +363,7 @@
         </pc:spChg>
       </pc:sldChg>
       <pc:sldChg chg="delSp modSp mod modAnim">
-        <pc:chgData name="Zhiyang Zhou" userId="715b216a-9552-4d73-a9aa-1ef002111b6f" providerId="ADAL" clId="{2B661EA1-28DD-4C7A-9BAA-1E2E41397E83}" dt="2026-09-23T00:47:35.741" v="2053" actId="14100"/>
+        <pc:chgData name="Zhiyang Zhou" userId="715b216a-9552-4d73-a9aa-1ef002111b6f" providerId="ADAL" clId="{2B661EA1-28DD-4C7A-9BAA-1E2E41397E83}" dt="2026-09-29T02:42:10.893" v="3543" actId="20577"/>
         <pc:sldMkLst>
           <pc:docMk/>
           <pc:sldMk cId="0" sldId="334"/>
@@ -409,14 +376,6 @@
             <ac:spMk id="2" creationId="{00000000-0000-0000-0000-000000000000}"/>
           </ac:spMkLst>
         </pc:spChg>
-        <pc:spChg chg="del mod">
-          <ac:chgData name="Zhiyang Zhou" userId="715b216a-9552-4d73-a9aa-1ef002111b6f" providerId="ADAL" clId="{2B661EA1-28DD-4C7A-9BAA-1E2E41397E83}" dt="2026-09-23T00:44:07.306" v="1915" actId="478"/>
-          <ac:spMkLst>
-            <pc:docMk/>
-            <pc:sldMk cId="0" sldId="334"/>
-            <ac:spMk id="3" creationId="{00000000-0000-0000-0000-000000000000}"/>
-          </ac:spMkLst>
-        </pc:spChg>
         <pc:spChg chg="mod">
           <ac:chgData name="Zhiyang Zhou" userId="715b216a-9552-4d73-a9aa-1ef002111b6f" providerId="ADAL" clId="{2B661EA1-28DD-4C7A-9BAA-1E2E41397E83}" dt="2026-09-23T00:40:57.820" v="1853" actId="20577"/>
           <ac:spMkLst>
@@ -426,7 +385,7 @@
           </ac:spMkLst>
         </pc:spChg>
         <pc:spChg chg="mod">
-          <ac:chgData name="Zhiyang Zhou" userId="715b216a-9552-4d73-a9aa-1ef002111b6f" providerId="ADAL" clId="{2B661EA1-28DD-4C7A-9BAA-1E2E41397E83}" dt="2026-09-23T00:47:35.741" v="2053" actId="14100"/>
+          <ac:chgData name="Zhiyang Zhou" userId="715b216a-9552-4d73-a9aa-1ef002111b6f" providerId="ADAL" clId="{2B661EA1-28DD-4C7A-9BAA-1E2E41397E83}" dt="2026-09-29T02:42:10.893" v="3543" actId="20577"/>
           <ac:spMkLst>
             <pc:docMk/>
             <pc:sldMk cId="0" sldId="334"/>
@@ -440,14 +399,6 @@
           <pc:docMk/>
           <pc:sldMk cId="0" sldId="335"/>
         </pc:sldMkLst>
-        <pc:spChg chg="del">
-          <ac:chgData name="Zhiyang Zhou" userId="715b216a-9552-4d73-a9aa-1ef002111b6f" providerId="ADAL" clId="{2B661EA1-28DD-4C7A-9BAA-1E2E41397E83}" dt="2026-09-23T00:51:28.645" v="2132" actId="478"/>
-          <ac:spMkLst>
-            <pc:docMk/>
-            <pc:sldMk cId="0" sldId="335"/>
-            <ac:spMk id="14" creationId="{00000000-0000-0000-0000-000000000000}"/>
-          </ac:spMkLst>
-        </pc:spChg>
         <pc:spChg chg="mod">
           <ac:chgData name="Zhiyang Zhou" userId="715b216a-9552-4d73-a9aa-1ef002111b6f" providerId="ADAL" clId="{2B661EA1-28DD-4C7A-9BAA-1E2E41397E83}" dt="2026-09-23T00:51:36.498" v="2154" actId="1036"/>
           <ac:spMkLst>
@@ -532,14 +483,6 @@
             <ac:spMk id="2" creationId="{00000000-0000-0000-0000-000000000000}"/>
           </ac:spMkLst>
         </pc:spChg>
-        <pc:spChg chg="del">
-          <ac:chgData name="Zhiyang Zhou" userId="715b216a-9552-4d73-a9aa-1ef002111b6f" providerId="ADAL" clId="{2B661EA1-28DD-4C7A-9BAA-1E2E41397E83}" dt="2026-09-23T00:48:53.237" v="2072" actId="478"/>
-          <ac:spMkLst>
-            <pc:docMk/>
-            <pc:sldMk cId="0" sldId="344"/>
-            <ac:spMk id="6" creationId="{00000000-0000-0000-0000-000000000000}"/>
-          </ac:spMkLst>
-        </pc:spChg>
         <pc:spChg chg="mod">
           <ac:chgData name="Zhiyang Zhou" userId="715b216a-9552-4d73-a9aa-1ef002111b6f" providerId="ADAL" clId="{2B661EA1-28DD-4C7A-9BAA-1E2E41397E83}" dt="2026-09-23T01:40:57.391" v="2861" actId="14100"/>
           <ac:spMkLst>
@@ -619,11 +562,19 @@
         </pc:picChg>
       </pc:sldChg>
       <pc:sldChg chg="addSp delSp modSp mod modAnim">
-        <pc:chgData name="Zhiyang Zhou" userId="715b216a-9552-4d73-a9aa-1ef002111b6f" providerId="ADAL" clId="{2B661EA1-28DD-4C7A-9BAA-1E2E41397E83}" dt="2026-09-23T01:17:51.383" v="2462" actId="338"/>
+        <pc:chgData name="Zhiyang Zhou" userId="715b216a-9552-4d73-a9aa-1ef002111b6f" providerId="ADAL" clId="{2B661EA1-28DD-4C7A-9BAA-1E2E41397E83}" dt="2026-09-29T03:36:00.727" v="3668" actId="1038"/>
         <pc:sldMkLst>
           <pc:docMk/>
           <pc:sldMk cId="0" sldId="364"/>
         </pc:sldMkLst>
+        <pc:spChg chg="mod">
+          <ac:chgData name="Zhiyang Zhou" userId="715b216a-9552-4d73-a9aa-1ef002111b6f" providerId="ADAL" clId="{2B661EA1-28DD-4C7A-9BAA-1E2E41397E83}" dt="2026-09-29T03:31:20.602" v="3558"/>
+          <ac:spMkLst>
+            <pc:docMk/>
+            <pc:sldMk cId="0" sldId="364"/>
+            <ac:spMk id="3" creationId="{00000000-0000-0000-0000-000000000000}"/>
+          </ac:spMkLst>
+        </pc:spChg>
         <pc:spChg chg="mod">
           <ac:chgData name="Zhiyang Zhou" userId="715b216a-9552-4d73-a9aa-1ef002111b6f" providerId="ADAL" clId="{2B661EA1-28DD-4C7A-9BAA-1E2E41397E83}" dt="2026-09-23T01:14:48.534" v="2427" actId="1076"/>
           <ac:spMkLst>
@@ -632,40 +583,24 @@
             <ac:spMk id="74754" creationId="{00000000-0000-0000-0000-000000000000}"/>
           </ac:spMkLst>
         </pc:spChg>
-        <pc:spChg chg="mod topLvl">
-          <ac:chgData name="Zhiyang Zhou" userId="715b216a-9552-4d73-a9aa-1ef002111b6f" providerId="ADAL" clId="{2B661EA1-28DD-4C7A-9BAA-1E2E41397E83}" dt="2026-09-23T01:17:51.383" v="2462" actId="338"/>
+        <pc:spChg chg="add del mod topLvl">
+          <ac:chgData name="Zhiyang Zhou" userId="715b216a-9552-4d73-a9aa-1ef002111b6f" providerId="ADAL" clId="{2B661EA1-28DD-4C7A-9BAA-1E2E41397E83}" dt="2026-09-29T03:36:00.727" v="3668" actId="1038"/>
           <ac:spMkLst>
             <pc:docMk/>
             <pc:sldMk cId="0" sldId="364"/>
             <ac:spMk id="227335" creationId="{00000000-0000-0000-0000-000000000000}"/>
           </ac:spMkLst>
         </pc:spChg>
-        <pc:spChg chg="mod topLvl">
-          <ac:chgData name="Zhiyang Zhou" userId="715b216a-9552-4d73-a9aa-1ef002111b6f" providerId="ADAL" clId="{2B661EA1-28DD-4C7A-9BAA-1E2E41397E83}" dt="2026-09-23T01:17:51.383" v="2462" actId="338"/>
+        <pc:spChg chg="del mod topLvl">
+          <ac:chgData name="Zhiyang Zhou" userId="715b216a-9552-4d73-a9aa-1ef002111b6f" providerId="ADAL" clId="{2B661EA1-28DD-4C7A-9BAA-1E2E41397E83}" dt="2026-09-29T03:35:49.618" v="3650" actId="478"/>
           <ac:spMkLst>
             <pc:docMk/>
             <pc:sldMk cId="0" sldId="364"/>
             <ac:spMk id="227336" creationId="{00000000-0000-0000-0000-000000000000}"/>
           </ac:spMkLst>
         </pc:spChg>
-        <pc:grpChg chg="del mod">
-          <ac:chgData name="Zhiyang Zhou" userId="715b216a-9552-4d73-a9aa-1ef002111b6f" providerId="ADAL" clId="{2B661EA1-28DD-4C7A-9BAA-1E2E41397E83}" dt="2026-09-23T01:15:28.731" v="2431" actId="165"/>
-          <ac:grpSpMkLst>
-            <pc:docMk/>
-            <pc:sldMk cId="0" sldId="364"/>
-            <ac:grpSpMk id="2" creationId="{00000000-0000-0000-0000-000000000000}"/>
-          </ac:grpSpMkLst>
-        </pc:grpChg>
-        <pc:grpChg chg="add mod">
-          <ac:chgData name="Zhiyang Zhou" userId="715b216a-9552-4d73-a9aa-1ef002111b6f" providerId="ADAL" clId="{2B661EA1-28DD-4C7A-9BAA-1E2E41397E83}" dt="2026-09-23T01:17:38.399" v="2461" actId="338"/>
-          <ac:grpSpMkLst>
-            <pc:docMk/>
-            <pc:sldMk cId="0" sldId="364"/>
-            <ac:grpSpMk id="4" creationId="{A159CB8F-F65D-E46B-B14A-E228D1E40952}"/>
-          </ac:grpSpMkLst>
-        </pc:grpChg>
-        <pc:grpChg chg="add mod">
-          <ac:chgData name="Zhiyang Zhou" userId="715b216a-9552-4d73-a9aa-1ef002111b6f" providerId="ADAL" clId="{2B661EA1-28DD-4C7A-9BAA-1E2E41397E83}" dt="2026-09-23T01:17:51.383" v="2462" actId="338"/>
+        <pc:grpChg chg="add del mod">
+          <ac:chgData name="Zhiyang Zhou" userId="715b216a-9552-4d73-a9aa-1ef002111b6f" providerId="ADAL" clId="{2B661EA1-28DD-4C7A-9BAA-1E2E41397E83}" dt="2026-09-29T03:30:57.721" v="3556" actId="165"/>
           <ac:grpSpMkLst>
             <pc:docMk/>
             <pc:sldMk cId="0" sldId="364"/>
@@ -673,20 +608,12 @@
           </ac:grpSpMkLst>
         </pc:grpChg>
       </pc:sldChg>
-      <pc:sldChg chg="modSp modAnim">
-        <pc:chgData name="Zhiyang Zhou" userId="715b216a-9552-4d73-a9aa-1ef002111b6f" providerId="ADAL" clId="{2B661EA1-28DD-4C7A-9BAA-1E2E41397E83}" dt="2026-09-23T01:18:16.525" v="2466" actId="20577"/>
+      <pc:sldChg chg="modSp del modAnim">
+        <pc:chgData name="Zhiyang Zhou" userId="715b216a-9552-4d73-a9aa-1ef002111b6f" providerId="ADAL" clId="{2B661EA1-28DD-4C7A-9BAA-1E2E41397E83}" dt="2026-09-29T03:36:13.246" v="3669" actId="2696"/>
         <pc:sldMkLst>
           <pc:docMk/>
           <pc:sldMk cId="0" sldId="366"/>
         </pc:sldMkLst>
-        <pc:spChg chg="mod">
-          <ac:chgData name="Zhiyang Zhou" userId="715b216a-9552-4d73-a9aa-1ef002111b6f" providerId="ADAL" clId="{2B661EA1-28DD-4C7A-9BAA-1E2E41397E83}" dt="2026-09-23T01:18:16.525" v="2466" actId="20577"/>
-          <ac:spMkLst>
-            <pc:docMk/>
-            <pc:sldMk cId="0" sldId="366"/>
-            <ac:spMk id="500739" creationId="{00000000-0000-0000-0000-000000000000}"/>
-          </ac:spMkLst>
-        </pc:spChg>
       </pc:sldChg>
       <pc:sldChg chg="modSp">
         <pc:chgData name="Zhiyang Zhou" userId="715b216a-9552-4d73-a9aa-1ef002111b6f" providerId="ADAL" clId="{2B661EA1-28DD-4C7A-9BAA-1E2E41397E83}" dt="2026-09-23T01:29:44.196" v="2568" actId="20577"/>
@@ -725,27 +652,6 @@
             <ac:spMk id="491523" creationId="{00000000-0000-0000-0000-000000000000}"/>
           </ac:spMkLst>
         </pc:spChg>
-      </pc:sldChg>
-      <pc:sldChg chg="del">
-        <pc:chgData name="Zhiyang Zhou" userId="715b216a-9552-4d73-a9aa-1ef002111b6f" providerId="ADAL" clId="{2B661EA1-28DD-4C7A-9BAA-1E2E41397E83}" dt="2026-09-23T01:28:32.187" v="2565" actId="47"/>
-        <pc:sldMkLst>
-          <pc:docMk/>
-          <pc:sldMk cId="1626877309" sldId="383"/>
-        </pc:sldMkLst>
-      </pc:sldChg>
-      <pc:sldChg chg="del">
-        <pc:chgData name="Zhiyang Zhou" userId="715b216a-9552-4d73-a9aa-1ef002111b6f" providerId="ADAL" clId="{2B661EA1-28DD-4C7A-9BAA-1E2E41397E83}" dt="2026-09-22T22:42:03.707" v="332" actId="47"/>
-        <pc:sldMkLst>
-          <pc:docMk/>
-          <pc:sldMk cId="3265427056" sldId="384"/>
-        </pc:sldMkLst>
-      </pc:sldChg>
-      <pc:sldChg chg="del">
-        <pc:chgData name="Zhiyang Zhou" userId="715b216a-9552-4d73-a9aa-1ef002111b6f" providerId="ADAL" clId="{2B661EA1-28DD-4C7A-9BAA-1E2E41397E83}" dt="2026-09-23T01:28:18.104" v="2564" actId="47"/>
-        <pc:sldMkLst>
-          <pc:docMk/>
-          <pc:sldMk cId="1726835629" sldId="400"/>
-        </pc:sldMkLst>
       </pc:sldChg>
     </pc:docChg>
   </pc:docChgLst>
@@ -1567,7 +1473,7 @@
               <a:pPr>
                 <a:defRPr/>
               </a:pPr>
-              <a:t>9/22/2026</a:t>
+              <a:t>9/28/2026</a:t>
             </a:fld>
             <a:endParaRPr lang="en-US"/>
           </a:p>
@@ -1782,7 +1688,7 @@
               <a:pPr>
                 <a:defRPr/>
               </a:pPr>
-              <a:t>9/22/2026</a:t>
+              <a:t>9/28/2026</a:t>
             </a:fld>
             <a:endParaRPr lang="en-US"/>
           </a:p>
@@ -2827,347 +2733,6 @@
     <p:extLst>
       <p:ext uri="{BB962C8B-B14F-4D97-AF65-F5344CB8AC3E}">
         <p14:creationId xmlns:p14="http://schemas.microsoft.com/office/powerpoint/2010/main" val="2423230241"/>
-      </p:ext>
-    </p:extLst>
-  </p:cSld>
-  <p:clrMapOvr>
-    <a:masterClrMapping/>
-  </p:clrMapOvr>
-</p:notes>
-</file>
-
-<file path=ppt/notesSlides/notesSlide14.xml><?xml version="1.0" encoding="utf-8"?>
-<p:notes xmlns:a="http://schemas.openxmlformats.org/drawingml/2006/main" xmlns:r="http://schemas.openxmlformats.org/officeDocument/2006/relationships" xmlns:p="http://schemas.openxmlformats.org/presentationml/2006/main">
-  <p:cSld>
-    <p:spTree>
-      <p:nvGrpSpPr>
-        <p:cNvPr id="1" name=""/>
-        <p:cNvGrpSpPr/>
-        <p:nvPr/>
-      </p:nvGrpSpPr>
-      <p:grpSpPr>
-        <a:xfrm>
-          <a:off x="0" y="0"/>
-          <a:ext cx="0" cy="0"/>
-          <a:chOff x="0" y="0"/>
-          <a:chExt cx="0" cy="0"/>
-        </a:xfrm>
-      </p:grpSpPr>
-      <p:sp>
-        <p:nvSpPr>
-          <p:cNvPr id="40961" name="Rectangle 2"/>
-          <p:cNvSpPr>
-            <a:spLocks noGrp="1" noChangeArrowheads="1"/>
-          </p:cNvSpPr>
-          <p:nvPr>
-            <p:ph type="hdr" sz="quarter"/>
-          </p:nvPr>
-        </p:nvSpPr>
-        <p:spPr bwMode="auto">
-          <a:ln>
-            <a:miter lim="800000"/>
-            <a:headEnd/>
-            <a:tailEnd/>
-          </a:ln>
-        </p:spPr>
-        <p:txBody>
-          <a:bodyPr rtlCol="0"/>
-          <a:lstStyle/>
-          <a:p>
-            <a:pPr>
-              <a:defRPr/>
-            </a:pPr>
-            <a:r>
-              <a:rPr lang="en-US">
-                <a:latin typeface="+mn-lt"/>
-                <a:ea typeface="ＭＳ Ｐゴシック" pitchFamily="-84" charset="-128"/>
-                <a:cs typeface="ＭＳ Ｐゴシック" pitchFamily="-84" charset="-128"/>
-              </a:rPr>
-              <a:t>Basic Practice of Statistics - 3rd Edition</a:t>
-            </a:r>
-          </a:p>
-        </p:txBody>
-      </p:sp>
-      <p:sp>
-        <p:nvSpPr>
-          <p:cNvPr id="40962" name="Rectangle 6"/>
-          <p:cNvSpPr>
-            <a:spLocks noGrp="1" noChangeArrowheads="1"/>
-          </p:cNvSpPr>
-          <p:nvPr>
-            <p:ph type="ftr" sz="quarter" idx="4"/>
-          </p:nvPr>
-        </p:nvSpPr>
-        <p:spPr bwMode="auto">
-          <a:ln>
-            <a:miter lim="800000"/>
-            <a:headEnd/>
-            <a:tailEnd/>
-          </a:ln>
-        </p:spPr>
-        <p:txBody>
-          <a:bodyPr rtlCol="0"/>
-          <a:lstStyle/>
-          <a:p>
-            <a:pPr>
-              <a:defRPr/>
-            </a:pPr>
-            <a:r>
-              <a:rPr lang="en-US">
-                <a:latin typeface="+mn-lt"/>
-                <a:ea typeface="ＭＳ Ｐゴシック" pitchFamily="-84" charset="-128"/>
-                <a:cs typeface="ＭＳ Ｐゴシック" pitchFamily="-84" charset="-128"/>
-              </a:rPr>
-              <a:t>Chapter 5</a:t>
-            </a:r>
-          </a:p>
-        </p:txBody>
-      </p:sp>
-      <p:sp>
-        <p:nvSpPr>
-          <p:cNvPr id="91140" name="Rectangle 7"/>
-          <p:cNvSpPr>
-            <a:spLocks noGrp="1" noChangeArrowheads="1"/>
-          </p:cNvSpPr>
-          <p:nvPr>
-            <p:ph type="sldNum" sz="quarter" idx="5"/>
-          </p:nvPr>
-        </p:nvSpPr>
-        <p:spPr bwMode="auto">
-          <a:noFill/>
-          <a:extLst>
-            <a:ext uri="{909E8E84-426E-40DD-AFC4-6F175D3DCCD1}">
-              <a14:hiddenFill xmlns:a14="http://schemas.microsoft.com/office/drawing/2010/main">
-                <a:solidFill>
-                  <a:srgbClr val="FFFFFF"/>
-                </a:solidFill>
-              </a14:hiddenFill>
-            </a:ext>
-            <a:ext uri="{91240B29-F687-4F45-9708-019B960494DF}">
-              <a14:hiddenLine xmlns:a14="http://schemas.microsoft.com/office/drawing/2010/main" w="9525">
-                <a:solidFill>
-                  <a:srgbClr val="000000"/>
-                </a:solidFill>
-                <a:miter lim="800000"/>
-                <a:headEnd/>
-                <a:tailEnd/>
-              </a14:hiddenLine>
-            </a:ext>
-          </a:extLst>
-        </p:spPr>
-        <p:txBody>
-          <a:bodyPr/>
-          <a:lstStyle>
-            <a:lvl1pPr>
-              <a:defRPr>
-                <a:solidFill>
-                  <a:schemeClr val="tx1"/>
-                </a:solidFill>
-                <a:latin typeface="Arial" pitchFamily="34" charset="0"/>
-                <a:ea typeface="ＭＳ Ｐゴシック" pitchFamily="34" charset="-128"/>
-              </a:defRPr>
-            </a:lvl1pPr>
-            <a:lvl2pPr marL="742950" indent="-285750">
-              <a:defRPr>
-                <a:solidFill>
-                  <a:schemeClr val="tx1"/>
-                </a:solidFill>
-                <a:latin typeface="Arial" pitchFamily="34" charset="0"/>
-                <a:ea typeface="ＭＳ Ｐゴシック" pitchFamily="34" charset="-128"/>
-              </a:defRPr>
-            </a:lvl2pPr>
-            <a:lvl3pPr marL="1143000" indent="-228600">
-              <a:defRPr>
-                <a:solidFill>
-                  <a:schemeClr val="tx1"/>
-                </a:solidFill>
-                <a:latin typeface="Arial" pitchFamily="34" charset="0"/>
-                <a:ea typeface="ＭＳ Ｐゴシック" pitchFamily="34" charset="-128"/>
-              </a:defRPr>
-            </a:lvl3pPr>
-            <a:lvl4pPr marL="1600200" indent="-228600">
-              <a:defRPr>
-                <a:solidFill>
-                  <a:schemeClr val="tx1"/>
-                </a:solidFill>
-                <a:latin typeface="Arial" pitchFamily="34" charset="0"/>
-                <a:ea typeface="ＭＳ Ｐゴシック" pitchFamily="34" charset="-128"/>
-              </a:defRPr>
-            </a:lvl4pPr>
-            <a:lvl5pPr marL="2057400" indent="-228600">
-              <a:defRPr>
-                <a:solidFill>
-                  <a:schemeClr val="tx1"/>
-                </a:solidFill>
-                <a:latin typeface="Arial" pitchFamily="34" charset="0"/>
-                <a:ea typeface="ＭＳ Ｐゴシック" pitchFamily="34" charset="-128"/>
-              </a:defRPr>
-            </a:lvl5pPr>
-            <a:lvl6pPr marL="2514600" indent="-228600" defTabSz="457200" eaLnBrk="0" fontAlgn="base" hangingPunct="0">
-              <a:spcBef>
-                <a:spcPct val="0"/>
-              </a:spcBef>
-              <a:spcAft>
-                <a:spcPct val="0"/>
-              </a:spcAft>
-              <a:defRPr>
-                <a:solidFill>
-                  <a:schemeClr val="tx1"/>
-                </a:solidFill>
-                <a:latin typeface="Arial" pitchFamily="34" charset="0"/>
-                <a:ea typeface="ＭＳ Ｐゴシック" pitchFamily="34" charset="-128"/>
-              </a:defRPr>
-            </a:lvl6pPr>
-            <a:lvl7pPr marL="2971800" indent="-228600" defTabSz="457200" eaLnBrk="0" fontAlgn="base" hangingPunct="0">
-              <a:spcBef>
-                <a:spcPct val="0"/>
-              </a:spcBef>
-              <a:spcAft>
-                <a:spcPct val="0"/>
-              </a:spcAft>
-              <a:defRPr>
-                <a:solidFill>
-                  <a:schemeClr val="tx1"/>
-                </a:solidFill>
-                <a:latin typeface="Arial" pitchFamily="34" charset="0"/>
-                <a:ea typeface="ＭＳ Ｐゴシック" pitchFamily="34" charset="-128"/>
-              </a:defRPr>
-            </a:lvl7pPr>
-            <a:lvl8pPr marL="3429000" indent="-228600" defTabSz="457200" eaLnBrk="0" fontAlgn="base" hangingPunct="0">
-              <a:spcBef>
-                <a:spcPct val="0"/>
-              </a:spcBef>
-              <a:spcAft>
-                <a:spcPct val="0"/>
-              </a:spcAft>
-              <a:defRPr>
-                <a:solidFill>
-                  <a:schemeClr val="tx1"/>
-                </a:solidFill>
-                <a:latin typeface="Arial" pitchFamily="34" charset="0"/>
-                <a:ea typeface="ＭＳ Ｐゴシック" pitchFamily="34" charset="-128"/>
-              </a:defRPr>
-            </a:lvl8pPr>
-            <a:lvl9pPr marL="3886200" indent="-228600" defTabSz="457200" eaLnBrk="0" fontAlgn="base" hangingPunct="0">
-              <a:spcBef>
-                <a:spcPct val="0"/>
-              </a:spcBef>
-              <a:spcAft>
-                <a:spcPct val="0"/>
-              </a:spcAft>
-              <a:defRPr>
-                <a:solidFill>
-                  <a:schemeClr val="tx1"/>
-                </a:solidFill>
-                <a:latin typeface="Arial" pitchFamily="34" charset="0"/>
-                <a:ea typeface="ＭＳ Ｐゴシック" pitchFamily="34" charset="-128"/>
-              </a:defRPr>
-            </a:lvl9pPr>
-          </a:lstStyle>
-          <a:p>
-            <a:fld id="{AD5F0DF9-B1E1-4803-8248-31ECBEC74B7E}" type="slidenum">
-              <a:rPr lang="en-US">
-                <a:latin typeface="Calibri" pitchFamily="34" charset="0"/>
-              </a:rPr>
-              <a:pPr/>
-              <a:t>22</a:t>
-            </a:fld>
-            <a:endParaRPr lang="en-US">
-              <a:latin typeface="Calibri" pitchFamily="34" charset="0"/>
-            </a:endParaRPr>
-          </a:p>
-        </p:txBody>
-      </p:sp>
-      <p:sp>
-        <p:nvSpPr>
-          <p:cNvPr id="91141" name="Rectangle 2"/>
-          <p:cNvSpPr>
-            <a:spLocks noGrp="1" noRot="1" noChangeAspect="1" noChangeArrowheads="1" noTextEdit="1"/>
-          </p:cNvSpPr>
-          <p:nvPr>
-            <p:ph type="sldImg"/>
-          </p:nvPr>
-        </p:nvSpPr>
-        <p:spPr bwMode="auto">
-          <a:xfrm>
-            <a:off x="1150938" y="690563"/>
-            <a:ext cx="4556125" cy="3417887"/>
-          </a:xfrm>
-          <a:noFill/>
-          <a:ln cap="flat">
-            <a:solidFill>
-              <a:srgbClr val="000000"/>
-            </a:solidFill>
-            <a:miter lim="800000"/>
-            <a:headEnd/>
-            <a:tailEnd/>
-          </a:ln>
-          <a:extLst>
-            <a:ext uri="{909E8E84-426E-40DD-AFC4-6F175D3DCCD1}">
-              <a14:hiddenFill xmlns:a14="http://schemas.microsoft.com/office/drawing/2010/main">
-                <a:solidFill>
-                  <a:srgbClr val="FFFFFF"/>
-                </a:solidFill>
-              </a14:hiddenFill>
-            </a:ext>
-          </a:extLst>
-        </p:spPr>
-      </p:sp>
-      <p:sp>
-        <p:nvSpPr>
-          <p:cNvPr id="91142" name="Rectangle 3"/>
-          <p:cNvSpPr>
-            <a:spLocks noGrp="1" noChangeArrowheads="1"/>
-          </p:cNvSpPr>
-          <p:nvPr>
-            <p:ph type="body" idx="1"/>
-          </p:nvPr>
-        </p:nvSpPr>
-        <p:spPr bwMode="auto">
-          <a:noFill/>
-          <a:extLst>
-            <a:ext uri="{909E8E84-426E-40DD-AFC4-6F175D3DCCD1}">
-              <a14:hiddenFill xmlns:a14="http://schemas.microsoft.com/office/drawing/2010/main">
-                <a:solidFill>
-                  <a:srgbClr val="FFFFFF"/>
-                </a:solidFill>
-              </a14:hiddenFill>
-            </a:ext>
-            <a:ext uri="{91240B29-F687-4F45-9708-019B960494DF}">
-              <a14:hiddenLine xmlns:a14="http://schemas.microsoft.com/office/drawing/2010/main" w="9525">
-                <a:solidFill>
-                  <a:srgbClr val="000000"/>
-                </a:solidFill>
-                <a:miter lim="800000"/>
-                <a:headEnd/>
-                <a:tailEnd/>
-              </a14:hiddenLine>
-            </a:ext>
-          </a:extLst>
-        </p:spPr>
-        <p:txBody>
-          <a:bodyPr wrap="square" numCol="1" anchor="t" anchorCtr="0" compatLnSpc="1">
-            <a:prstTxWarp prst="textNoShape">
-              <a:avLst/>
-            </a:prstTxWarp>
-          </a:bodyPr>
-          <a:lstStyle/>
-          <a:p>
-            <a:pPr eaLnBrk="1" hangingPunct="1">
-              <a:spcBef>
-                <a:spcPct val="0"/>
-              </a:spcBef>
-            </a:pPr>
-            <a:endParaRPr lang="en-US">
-              <a:ea typeface="ＭＳ Ｐゴシック" pitchFamily="34" charset="-128"/>
-            </a:endParaRPr>
-          </a:p>
-        </p:txBody>
-      </p:sp>
-    </p:spTree>
-    <p:extLst>
-      <p:ext uri="{BB962C8B-B14F-4D97-AF65-F5344CB8AC3E}">
-        <p14:creationId xmlns:p14="http://schemas.microsoft.com/office/powerpoint/2010/main" val="2761735034"/>
       </p:ext>
     </p:extLst>
   </p:cSld>
@@ -11717,8 +11282,8 @@
           </a:p>
         </p:txBody>
       </p:sp>
-      <mc:AlternateContent xmlns:mc="http://schemas.openxmlformats.org/markup-compatibility/2006">
-        <mc:Choice xmlns:a14="http://schemas.microsoft.com/office/drawing/2010/main" Requires="a14">
+      <mc:AlternateContent xmlns:mc="http://schemas.openxmlformats.org/markup-compatibility/2006" xmlns:a14="http://schemas.microsoft.com/office/drawing/2010/main">
+        <mc:Choice Requires="a14">
           <p:sp>
             <p:nvSpPr>
               <p:cNvPr id="476163" name="Rectangle 3"/>
@@ -13072,7 +12637,7 @@
             </p:txBody>
           </p:sp>
         </mc:Choice>
-        <mc:Fallback>
+        <mc:Fallback xmlns="">
           <p:sp>
             <p:nvSpPr>
               <p:cNvPr id="476163" name="Rectangle 3"/>
@@ -13670,8 +13235,8 @@
           </a:p>
         </p:txBody>
       </p:sp>
-      <mc:AlternateContent xmlns:mc="http://schemas.openxmlformats.org/markup-compatibility/2006">
-        <mc:Choice xmlns:a14="http://schemas.microsoft.com/office/drawing/2010/main" Requires="a14">
+      <mc:AlternateContent xmlns:mc="http://schemas.openxmlformats.org/markup-compatibility/2006" xmlns:a14="http://schemas.microsoft.com/office/drawing/2010/main">
+        <mc:Choice Requires="a14">
           <p:sp>
             <p:nvSpPr>
               <p:cNvPr id="477187" name="Rectangle 3" descr="A residual is the difference between an observed value of the response variable and the value predicted by the regression line:&#10;residual = observed y – predicted y is equal to Y minus Y hat."/>
@@ -13925,7 +13490,7 @@
             </p:txBody>
           </p:sp>
         </mc:Choice>
-        <mc:Fallback>
+        <mc:Fallback xmlns="">
           <p:sp>
             <p:nvSpPr>
               <p:cNvPr id="477187" name="Rectangle 3" descr="A residual is the difference between an observed value of the response variable and the value predicted by the regression line:&#10;residual = observed y – predicted y is equal to Y minus Y hat."/>
@@ -22376,14 +21941,9 @@
           <a:lstStyle/>
           <a:p>
             <a:r>
-              <a:rPr lang="en-US" dirty="0">
-                <a:solidFill>
-                  <a:schemeClr val="accent1"/>
-                </a:solidFill>
-              </a:rPr>
-              <a:t>Establishing Causation</a:t>
-            </a:r>
-            <a:endParaRPr lang="en-US" dirty="0"/>
+              <a:rPr lang="en-US" dirty="0"/>
+              <a:t>Causation from Observational Data</a:t>
+            </a:r>
           </a:p>
         </p:txBody>
       </p:sp>
@@ -22768,211 +22328,98 @@
           </a:p>
         </p:txBody>
       </p:sp>
-      <p:grpSp>
-        <p:nvGrpSpPr>
-          <p:cNvPr id="5" name="Group 4">
-            <a:extLst>
-              <a:ext uri="{FF2B5EF4-FFF2-40B4-BE49-F238E27FC236}">
-                <a16:creationId xmlns:a16="http://schemas.microsoft.com/office/drawing/2014/main" id="{72B0DDDA-8C66-05FE-01F9-5A23D9C45C9B}"/>
-              </a:ext>
-            </a:extLst>
-          </p:cNvPr>
-          <p:cNvGrpSpPr/>
+      <p:sp>
+        <p:nvSpPr>
+          <p:cNvPr id="227335" name="Text Box 7"/>
+          <p:cNvSpPr txBox="1">
+            <a:spLocks/>
+          </p:cNvSpPr>
           <p:nvPr/>
-        </p:nvGrpSpPr>
-        <p:grpSpPr>
+        </p:nvSpPr>
+        <p:spPr bwMode="auto">
           <a:xfrm>
-            <a:off x="423697" y="3307947"/>
-            <a:ext cx="7628358" cy="3455570"/>
-            <a:chOff x="423697" y="3307947"/>
-            <a:chExt cx="7628358" cy="3455570"/>
+            <a:off x="334237" y="3360640"/>
+            <a:ext cx="7616219" cy="3451651"/>
           </a:xfrm>
-        </p:grpSpPr>
-        <p:sp>
-          <p:nvSpPr>
-            <p:cNvPr id="227335" name="Text Box 7"/>
-            <p:cNvSpPr txBox="1">
-              <a:spLocks/>
-            </p:cNvSpPr>
-            <p:nvPr/>
-          </p:nvSpPr>
-          <p:spPr bwMode="auto">
-            <a:xfrm>
-              <a:off x="435836" y="4258863"/>
-              <a:ext cx="7616219" cy="2504654"/>
-            </a:xfrm>
-            <a:prstGeom prst="rect">
-              <a:avLst/>
-            </a:prstGeom>
-            <a:solidFill>
-              <a:srgbClr val="EEEFD6"/>
-            </a:solidFill>
-            <a:ln w="9525">
-              <a:noFill/>
-              <a:miter lim="800000"/>
-              <a:headEnd/>
-              <a:tailEnd/>
-            </a:ln>
-          </p:spPr>
-          <p:txBody>
-            <a:bodyPr wrap="square">
-              <a:spAutoFit/>
-            </a:bodyPr>
-            <a:lstStyle/>
-            <a:p>
-              <a:pPr marL="457200" indent="-457200">
-                <a:lnSpc>
-                  <a:spcPct val="110000"/>
-                </a:lnSpc>
-                <a:spcAft>
-                  <a:spcPct val="15000"/>
-                </a:spcAft>
-                <a:buFont typeface="+mj-lt"/>
-                <a:buAutoNum type="arabicPeriod"/>
-                <a:defRPr/>
-              </a:pPr>
-              <a:r>
-                <a:rPr lang="en-US" sz="2000" dirty="0">
-                  <a:latin typeface="Arial" pitchFamily="-84" charset="0"/>
-                  <a:ea typeface="ＭＳ Ｐゴシック" pitchFamily="-84" charset="-128"/>
-                  <a:cs typeface="ＭＳ Ｐゴシック" pitchFamily="-84" charset="-128"/>
-                </a:rPr>
-                <a:t>The association is strong.</a:t>
-              </a:r>
-            </a:p>
-            <a:p>
-              <a:pPr marL="457200" indent="-457200">
-                <a:lnSpc>
-                  <a:spcPct val="110000"/>
-                </a:lnSpc>
-                <a:spcAft>
-                  <a:spcPct val="15000"/>
-                </a:spcAft>
-                <a:buFont typeface="+mj-lt"/>
-                <a:buAutoNum type="arabicPeriod"/>
-                <a:defRPr/>
-              </a:pPr>
-              <a:r>
-                <a:rPr lang="en-US" sz="2000" dirty="0">
-                  <a:latin typeface="Arial" pitchFamily="-84" charset="0"/>
-                  <a:ea typeface="ＭＳ Ｐゴシック" pitchFamily="-84" charset="-128"/>
-                  <a:cs typeface="ＭＳ Ｐゴシック" pitchFamily="-84" charset="-128"/>
-                </a:rPr>
-                <a:t>The association is consistent.</a:t>
-              </a:r>
-            </a:p>
-            <a:p>
-              <a:pPr marL="457200" indent="-457200">
-                <a:lnSpc>
-                  <a:spcPct val="110000"/>
-                </a:lnSpc>
-                <a:spcAft>
-                  <a:spcPct val="15000"/>
-                </a:spcAft>
-                <a:buFont typeface="+mj-lt"/>
-                <a:buAutoNum type="arabicPeriod"/>
-                <a:defRPr/>
-              </a:pPr>
-              <a:r>
-                <a:rPr lang="en-US" sz="2000" dirty="0">
-                  <a:latin typeface="Arial" pitchFamily="-84" charset="0"/>
-                  <a:ea typeface="ＭＳ Ｐゴシック" pitchFamily="-84" charset="-128"/>
-                  <a:cs typeface="ＭＳ Ｐゴシック" pitchFamily="-84" charset="-128"/>
-                </a:rPr>
-                <a:t>Higher doses are associated with stronger responses.</a:t>
-              </a:r>
-            </a:p>
-            <a:p>
-              <a:pPr marL="457200" indent="-457200">
-                <a:lnSpc>
-                  <a:spcPct val="110000"/>
-                </a:lnSpc>
-                <a:spcAft>
-                  <a:spcPct val="15000"/>
-                </a:spcAft>
-                <a:buFont typeface="+mj-lt"/>
-                <a:buAutoNum type="arabicPeriod"/>
-                <a:defRPr/>
-              </a:pPr>
-              <a:r>
-                <a:rPr lang="en-US" sz="2000" dirty="0">
-                  <a:latin typeface="Arial" pitchFamily="-84" charset="0"/>
-                  <a:ea typeface="ＭＳ Ｐゴシック" pitchFamily="-84" charset="-128"/>
-                  <a:cs typeface="ＭＳ Ｐゴシック" pitchFamily="-84" charset="-128"/>
-                </a:rPr>
-                <a:t>Alleged cause precedes the effect.</a:t>
-              </a:r>
-            </a:p>
-            <a:p>
-              <a:pPr marL="457200" indent="-457200">
-                <a:lnSpc>
-                  <a:spcPct val="110000"/>
-                </a:lnSpc>
-                <a:spcAft>
-                  <a:spcPct val="15000"/>
-                </a:spcAft>
-                <a:buFont typeface="+mj-lt"/>
-                <a:buAutoNum type="arabicPeriod"/>
-                <a:defRPr/>
-              </a:pPr>
-              <a:r>
-                <a:rPr lang="en-US" sz="2000" dirty="0">
-                  <a:latin typeface="Arial" pitchFamily="-84" charset="0"/>
-                  <a:ea typeface="ＭＳ Ｐゴシック" pitchFamily="-84" charset="-128"/>
-                  <a:cs typeface="ＭＳ Ｐゴシック" pitchFamily="-84" charset="-128"/>
-                </a:rPr>
-                <a:t>The alleged cause is plausible.</a:t>
-              </a:r>
-            </a:p>
-          </p:txBody>
-        </p:sp>
-        <p:sp>
-          <p:nvSpPr>
-            <p:cNvPr id="227336" name="Text Box 8"/>
-            <p:cNvSpPr txBox="1">
-              <a:spLocks/>
-            </p:cNvSpPr>
-            <p:nvPr/>
-          </p:nvSpPr>
-          <p:spPr bwMode="auto">
-            <a:xfrm>
-              <a:off x="423697" y="3307947"/>
-              <a:ext cx="7616219" cy="902323"/>
-            </a:xfrm>
-            <a:prstGeom prst="rect">
-              <a:avLst/>
-            </a:prstGeom>
-            <a:solidFill>
-              <a:srgbClr val="EEEFD6"/>
-            </a:solidFill>
-            <a:ln w="9525">
-              <a:noFill/>
-              <a:miter lim="800000"/>
-              <a:headEnd/>
-              <a:tailEnd/>
-            </a:ln>
-          </p:spPr>
-          <p:txBody>
-            <a:bodyPr>
-              <a:spAutoFit/>
-            </a:bodyPr>
-            <a:lstStyle/>
-            <a:p>
-              <a:pPr>
-                <a:defRPr/>
-              </a:pPr>
-              <a:r>
-                <a:rPr lang="en-US" sz="2000" dirty="0">
-                  <a:latin typeface="Arial" pitchFamily="-84" charset="0"/>
-                  <a:ea typeface="ＭＳ Ｐゴシック" pitchFamily="-84" charset="-128"/>
-                  <a:cs typeface="ＭＳ Ｐゴシック" pitchFamily="-84" charset="-128"/>
-                </a:rPr>
-                <a:t>When experiments are not possible, the following considerations can strengthen evidence for causation:</a:t>
-              </a:r>
-            </a:p>
-          </p:txBody>
-        </p:sp>
-      </p:grpSp>
+          <a:prstGeom prst="rect">
+            <a:avLst/>
+          </a:prstGeom>
+          <a:solidFill>
+            <a:srgbClr val="EEEFD6"/>
+          </a:solidFill>
+          <a:ln w="9525">
+            <a:noFill/>
+            <a:miter lim="800000"/>
+            <a:headEnd/>
+            <a:tailEnd/>
+          </a:ln>
+        </p:spPr>
+        <p:txBody>
+          <a:bodyPr wrap="square">
+            <a:spAutoFit/>
+          </a:bodyPr>
+          <a:lstStyle/>
+          <a:p>
+            <a:pPr>
+              <a:lnSpc>
+                <a:spcPct val="110000"/>
+              </a:lnSpc>
+              <a:spcAft>
+                <a:spcPct val="15000"/>
+              </a:spcAft>
+              <a:defRPr/>
+            </a:pPr>
+            <a:r>
+              <a:rPr lang="en-US" sz="2000" dirty="0"/>
+              <a:t>An association, even a strong one, does </a:t>
+            </a:r>
+            <a:r>
+              <a:rPr lang="en-US" sz="2000" b="1" dirty="0"/>
+              <a:t>not by itself establish causation</a:t>
+            </a:r>
+            <a:r>
+              <a:rPr lang="en-US" sz="2000" dirty="0"/>
+              <a:t>. A well-designed randomized </a:t>
+            </a:r>
+            <a:r>
+              <a:rPr lang="en-US" sz="2000" b="1" i="1" dirty="0"/>
+              <a:t>experiment</a:t>
+            </a:r>
+            <a:r>
+              <a:rPr lang="en-US" sz="2000" dirty="0"/>
+              <a:t> can provide strong evidence for a causal effect.</a:t>
+            </a:r>
+            <a:r>
+              <a:rPr lang="en-US" sz="2000" i="1" dirty="0"/>
+              <a:t> </a:t>
+            </a:r>
+            <a:r>
+              <a:rPr lang="en-US" sz="2000" dirty="0">
+                <a:latin typeface="Arial" pitchFamily="-84" charset="0"/>
+                <a:ea typeface="ＭＳ Ｐゴシック" pitchFamily="-84" charset="-128"/>
+                <a:cs typeface="ＭＳ Ｐゴシック" pitchFamily="-84" charset="-128"/>
+              </a:rPr>
+              <a:t>When randomized experiments are not possible, determining whether an association is causal requires careful consideration of alternative explanations, particularly confounding and bias. The textbook discusses five considerations that may provide supporting evidence: strength, consistency, dose-response, temporality, and plausibility. These considerations do not constitute a definitive test for causation. See </a:t>
+            </a:r>
+            <a:r>
+              <a:rPr lang="en-US" sz="2000" b="1" i="1" dirty="0">
+                <a:latin typeface="Arial" pitchFamily="-84" charset="0"/>
+                <a:ea typeface="ＭＳ Ｐゴシック" pitchFamily="-84" charset="-128"/>
+                <a:cs typeface="ＭＳ Ｐゴシック" pitchFamily="-84" charset="-128"/>
+              </a:rPr>
+              <a:t>causal inference</a:t>
+            </a:r>
+            <a:r>
+              <a:rPr lang="en-US" sz="2000" dirty="0">
+                <a:latin typeface="Arial" pitchFamily="-84" charset="0"/>
+                <a:ea typeface="ＭＳ Ｐゴシック" pitchFamily="-84" charset="-128"/>
+                <a:cs typeface="ＭＳ Ｐゴシック" pitchFamily="-84" charset="-128"/>
+              </a:rPr>
+              <a:t> courses and references.</a:t>
+            </a:r>
+          </a:p>
+        </p:txBody>
+      </p:sp>
     </p:spTree>
   </p:cSld>
   <p:clrMapOvr>
@@ -22982,1033 +22429,6 @@
 </file>
 
 <file path=ppt/slides/slide22.xml><?xml version="1.0" encoding="utf-8"?>
-<p:sld xmlns:a="http://schemas.openxmlformats.org/drawingml/2006/main" xmlns:r="http://schemas.openxmlformats.org/officeDocument/2006/relationships" xmlns:p="http://schemas.openxmlformats.org/presentationml/2006/main" showMasterPhAnim="0">
-  <p:cSld>
-    <p:spTree>
-      <p:nvGrpSpPr>
-        <p:cNvPr id="1" name=""/>
-        <p:cNvGrpSpPr/>
-        <p:nvPr/>
-      </p:nvGrpSpPr>
-      <p:grpSpPr>
-        <a:xfrm>
-          <a:off x="0" y="0"/>
-          <a:ext cx="0" cy="0"/>
-          <a:chOff x="0" y="0"/>
-          <a:chExt cx="0" cy="0"/>
-        </a:xfrm>
-      </p:grpSpPr>
-      <p:sp>
-        <p:nvSpPr>
-          <p:cNvPr id="2" name="Title 1"/>
-          <p:cNvSpPr>
-            <a:spLocks noGrp="1"/>
-          </p:cNvSpPr>
-          <p:nvPr>
-            <p:ph type="title"/>
-          </p:nvPr>
-        </p:nvSpPr>
-        <p:spPr/>
-        <p:txBody>
-          <a:bodyPr/>
-          <a:lstStyle/>
-          <a:p>
-            <a:r>
-              <a:rPr lang="en-US" dirty="0">
-                <a:solidFill>
-                  <a:schemeClr val="accent1"/>
-                </a:solidFill>
-              </a:rPr>
-              <a:t>Evidence of Causation</a:t>
-            </a:r>
-            <a:endParaRPr lang="en-US" dirty="0"/>
-          </a:p>
-        </p:txBody>
-      </p:sp>
-      <p:sp>
-        <p:nvSpPr>
-          <p:cNvPr id="75779" name="Slide Number Placeholder 5"/>
-          <p:cNvSpPr>
-            <a:spLocks noGrp="1"/>
-          </p:cNvSpPr>
-          <p:nvPr>
-            <p:ph type="sldNum" sz="quarter" idx="12"/>
-          </p:nvPr>
-        </p:nvSpPr>
-        <p:spPr bwMode="auto">
-          <a:xfrm>
-            <a:off x="8256588" y="360363"/>
-            <a:ext cx="506412" cy="365125"/>
-          </a:xfrm>
-          <a:noFill/>
-          <a:extLst>
-            <a:ext uri="{909E8E84-426E-40DD-AFC4-6F175D3DCCD1}">
-              <a14:hiddenFill xmlns:a14="http://schemas.microsoft.com/office/drawing/2010/main">
-                <a:solidFill>
-                  <a:srgbClr val="FFFFFF"/>
-                </a:solidFill>
-              </a14:hiddenFill>
-            </a:ext>
-            <a:ext uri="{91240B29-F687-4F45-9708-019B960494DF}">
-              <a14:hiddenLine xmlns:a14="http://schemas.microsoft.com/office/drawing/2010/main" w="9525">
-                <a:solidFill>
-                  <a:srgbClr val="000000"/>
-                </a:solidFill>
-                <a:miter lim="800000"/>
-                <a:headEnd/>
-                <a:tailEnd/>
-              </a14:hiddenLine>
-            </a:ext>
-          </a:extLst>
-        </p:spPr>
-        <p:txBody>
-          <a:bodyPr/>
-          <a:lstStyle>
-            <a:lvl1pPr>
-              <a:defRPr>
-                <a:solidFill>
-                  <a:schemeClr val="tx1"/>
-                </a:solidFill>
-                <a:latin typeface="Arial" pitchFamily="34" charset="0"/>
-                <a:ea typeface="ＭＳ Ｐゴシック" pitchFamily="34" charset="-128"/>
-              </a:defRPr>
-            </a:lvl1pPr>
-            <a:lvl2pPr marL="742950" indent="-285750">
-              <a:defRPr>
-                <a:solidFill>
-                  <a:schemeClr val="tx1"/>
-                </a:solidFill>
-                <a:latin typeface="Arial" pitchFamily="34" charset="0"/>
-                <a:ea typeface="ＭＳ Ｐゴシック" pitchFamily="34" charset="-128"/>
-              </a:defRPr>
-            </a:lvl2pPr>
-            <a:lvl3pPr marL="1143000" indent="-228600">
-              <a:defRPr>
-                <a:solidFill>
-                  <a:schemeClr val="tx1"/>
-                </a:solidFill>
-                <a:latin typeface="Arial" pitchFamily="34" charset="0"/>
-                <a:ea typeface="ＭＳ Ｐゴシック" pitchFamily="34" charset="-128"/>
-              </a:defRPr>
-            </a:lvl3pPr>
-            <a:lvl4pPr marL="1600200" indent="-228600">
-              <a:defRPr>
-                <a:solidFill>
-                  <a:schemeClr val="tx1"/>
-                </a:solidFill>
-                <a:latin typeface="Arial" pitchFamily="34" charset="0"/>
-                <a:ea typeface="ＭＳ Ｐゴシック" pitchFamily="34" charset="-128"/>
-              </a:defRPr>
-            </a:lvl4pPr>
-            <a:lvl5pPr marL="2057400" indent="-228600">
-              <a:defRPr>
-                <a:solidFill>
-                  <a:schemeClr val="tx1"/>
-                </a:solidFill>
-                <a:latin typeface="Arial" pitchFamily="34" charset="0"/>
-                <a:ea typeface="ＭＳ Ｐゴシック" pitchFamily="34" charset="-128"/>
-              </a:defRPr>
-            </a:lvl5pPr>
-            <a:lvl6pPr marL="2514600" indent="-228600" defTabSz="457200" eaLnBrk="0" fontAlgn="base" hangingPunct="0">
-              <a:spcBef>
-                <a:spcPct val="0"/>
-              </a:spcBef>
-              <a:spcAft>
-                <a:spcPct val="0"/>
-              </a:spcAft>
-              <a:defRPr>
-                <a:solidFill>
-                  <a:schemeClr val="tx1"/>
-                </a:solidFill>
-                <a:latin typeface="Arial" pitchFamily="34" charset="0"/>
-                <a:ea typeface="ＭＳ Ｐゴシック" pitchFamily="34" charset="-128"/>
-              </a:defRPr>
-            </a:lvl6pPr>
-            <a:lvl7pPr marL="2971800" indent="-228600" defTabSz="457200" eaLnBrk="0" fontAlgn="base" hangingPunct="0">
-              <a:spcBef>
-                <a:spcPct val="0"/>
-              </a:spcBef>
-              <a:spcAft>
-                <a:spcPct val="0"/>
-              </a:spcAft>
-              <a:defRPr>
-                <a:solidFill>
-                  <a:schemeClr val="tx1"/>
-                </a:solidFill>
-                <a:latin typeface="Arial" pitchFamily="34" charset="0"/>
-                <a:ea typeface="ＭＳ Ｐゴシック" pitchFamily="34" charset="-128"/>
-              </a:defRPr>
-            </a:lvl7pPr>
-            <a:lvl8pPr marL="3429000" indent="-228600" defTabSz="457200" eaLnBrk="0" fontAlgn="base" hangingPunct="0">
-              <a:spcBef>
-                <a:spcPct val="0"/>
-              </a:spcBef>
-              <a:spcAft>
-                <a:spcPct val="0"/>
-              </a:spcAft>
-              <a:defRPr>
-                <a:solidFill>
-                  <a:schemeClr val="tx1"/>
-                </a:solidFill>
-                <a:latin typeface="Arial" pitchFamily="34" charset="0"/>
-                <a:ea typeface="ＭＳ Ｐゴシック" pitchFamily="34" charset="-128"/>
-              </a:defRPr>
-            </a:lvl8pPr>
-            <a:lvl9pPr marL="3886200" indent="-228600" defTabSz="457200" eaLnBrk="0" fontAlgn="base" hangingPunct="0">
-              <a:spcBef>
-                <a:spcPct val="0"/>
-              </a:spcBef>
-              <a:spcAft>
-                <a:spcPct val="0"/>
-              </a:spcAft>
-              <a:defRPr>
-                <a:solidFill>
-                  <a:schemeClr val="tx1"/>
-                </a:solidFill>
-                <a:latin typeface="Arial" pitchFamily="34" charset="0"/>
-                <a:ea typeface="ＭＳ Ｐゴシック" pitchFamily="34" charset="-128"/>
-              </a:defRPr>
-            </a:lvl9pPr>
-          </a:lstStyle>
-          <a:p>
-            <a:pPr>
-              <a:lnSpc>
-                <a:spcPct val="80000"/>
-              </a:lnSpc>
-            </a:pPr>
-            <a:fld id="{15309393-FC56-409A-9676-F51C6EAE697E}" type="slidenum">
-              <a:rPr lang="en-US" sz="1200">
-                <a:solidFill>
-                  <a:schemeClr val="accent1"/>
-                </a:solidFill>
-              </a:rPr>
-              <a:pPr>
-                <a:lnSpc>
-                  <a:spcPct val="80000"/>
-                </a:lnSpc>
-              </a:pPr>
-              <a:t>22</a:t>
-            </a:fld>
-            <a:endParaRPr lang="en-US" sz="1200">
-              <a:solidFill>
-                <a:schemeClr val="accent1"/>
-              </a:solidFill>
-            </a:endParaRPr>
-          </a:p>
-        </p:txBody>
-      </p:sp>
-      <p:sp>
-        <p:nvSpPr>
-          <p:cNvPr id="500739" name="Rectangle 3"/>
-          <p:cNvSpPr>
-            <a:spLocks noGrp="1" noChangeArrowheads="1"/>
-          </p:cNvSpPr>
-          <p:nvPr>
-            <p:ph sz="quarter" idx="4294967295"/>
-          </p:nvPr>
-        </p:nvSpPr>
-        <p:spPr>
-          <a:xfrm>
-            <a:off x="174624" y="1380763"/>
-            <a:ext cx="7172325" cy="4887912"/>
-          </a:xfrm>
-        </p:spPr>
-        <p:txBody>
-          <a:bodyPr/>
-          <a:lstStyle/>
-          <a:p>
-            <a:pPr eaLnBrk="1" hangingPunct="1">
-              <a:lnSpc>
-                <a:spcPct val="85000"/>
-              </a:lnSpc>
-              <a:spcAft>
-                <a:spcPts val="1200"/>
-              </a:spcAft>
-              <a:buNone/>
-            </a:pPr>
-            <a:r>
-              <a:rPr lang="en-US" dirty="0">
-                <a:solidFill>
-                  <a:schemeClr val="tx1"/>
-                </a:solidFill>
-                <a:ea typeface="ＭＳ Ｐゴシック" pitchFamily="34" charset="-128"/>
-              </a:rPr>
-              <a:t>A well-designed randomized </a:t>
-            </a:r>
-            <a:r>
-              <a:rPr lang="en-US" b="1" i="1" dirty="0">
-                <a:solidFill>
-                  <a:schemeClr val="tx1"/>
-                </a:solidFill>
-                <a:ea typeface="ＭＳ Ｐゴシック" pitchFamily="34" charset="-128"/>
-              </a:rPr>
-              <a:t>experiment</a:t>
-            </a:r>
-            <a:r>
-              <a:rPr lang="en-US" dirty="0">
-                <a:solidFill>
-                  <a:schemeClr val="tx1"/>
-                </a:solidFill>
-                <a:ea typeface="ＭＳ Ｐゴシック" pitchFamily="34" charset="-128"/>
-              </a:rPr>
-              <a:t> can provide strong evidence for a causal effect.</a:t>
-            </a:r>
-            <a:endParaRPr lang="en-US" i="1" dirty="0">
-              <a:solidFill>
-                <a:schemeClr val="tx1"/>
-              </a:solidFill>
-              <a:ea typeface="ＭＳ Ｐゴシック" pitchFamily="34" charset="-128"/>
-            </a:endParaRPr>
-          </a:p>
-          <a:p>
-            <a:pPr eaLnBrk="1" hangingPunct="1">
-              <a:lnSpc>
-                <a:spcPct val="85000"/>
-              </a:lnSpc>
-              <a:spcAft>
-                <a:spcPts val="1200"/>
-              </a:spcAft>
-              <a:buFont typeface="Wingdings 2" pitchFamily="18" charset="2"/>
-              <a:buNone/>
-            </a:pPr>
-            <a:r>
-              <a:rPr lang="en-US" dirty="0">
-                <a:solidFill>
-                  <a:schemeClr val="tx1"/>
-                </a:solidFill>
-                <a:ea typeface="ＭＳ Ｐゴシック" pitchFamily="34" charset="-128"/>
-              </a:rPr>
-              <a:t>Other considerations when we cannot do an experiment:</a:t>
-            </a:r>
-          </a:p>
-          <a:p>
-            <a:pPr lvl="1" eaLnBrk="1" hangingPunct="1">
-              <a:lnSpc>
-                <a:spcPct val="85000"/>
-              </a:lnSpc>
-              <a:spcAft>
-                <a:spcPts val="1200"/>
-              </a:spcAft>
-              <a:buClr>
-                <a:schemeClr val="accent1"/>
-              </a:buClr>
-            </a:pPr>
-            <a:r>
-              <a:rPr lang="en-US" sz="2000" dirty="0">
-                <a:solidFill>
-                  <a:schemeClr val="tx1"/>
-                </a:solidFill>
-                <a:ea typeface="ＭＳ Ｐゴシック" pitchFamily="34" charset="-128"/>
-              </a:rPr>
-              <a:t>The association is </a:t>
-            </a:r>
-            <a:r>
-              <a:rPr lang="en-US" sz="2000" i="1" dirty="0">
-                <a:solidFill>
-                  <a:schemeClr val="tx1"/>
-                </a:solidFill>
-                <a:ea typeface="ＭＳ Ｐゴシック" pitchFamily="34" charset="-128"/>
-              </a:rPr>
-              <a:t>strong.</a:t>
-            </a:r>
-          </a:p>
-          <a:p>
-            <a:pPr lvl="1" eaLnBrk="1" hangingPunct="1">
-              <a:lnSpc>
-                <a:spcPct val="85000"/>
-              </a:lnSpc>
-              <a:spcAft>
-                <a:spcPts val="1200"/>
-              </a:spcAft>
-              <a:buClr>
-                <a:schemeClr val="accent1"/>
-              </a:buClr>
-            </a:pPr>
-            <a:r>
-              <a:rPr lang="en-US" sz="2000" dirty="0">
-                <a:solidFill>
-                  <a:schemeClr val="tx1"/>
-                </a:solidFill>
-                <a:ea typeface="ＭＳ Ｐゴシック" pitchFamily="34" charset="-128"/>
-              </a:rPr>
-              <a:t>The association is </a:t>
-            </a:r>
-            <a:r>
-              <a:rPr lang="en-US" sz="2000" i="1" dirty="0">
-                <a:solidFill>
-                  <a:schemeClr val="tx1"/>
-                </a:solidFill>
-                <a:ea typeface="ＭＳ Ｐゴシック" pitchFamily="34" charset="-128"/>
-              </a:rPr>
-              <a:t>consistent.</a:t>
-            </a:r>
-          </a:p>
-          <a:p>
-            <a:pPr lvl="2" eaLnBrk="1" hangingPunct="1">
-              <a:lnSpc>
-                <a:spcPct val="85000"/>
-              </a:lnSpc>
-              <a:spcAft>
-                <a:spcPts val="1200"/>
-              </a:spcAft>
-              <a:buSzPct val="75000"/>
-            </a:pPr>
-            <a:r>
-              <a:rPr lang="en-US" sz="2000" dirty="0">
-                <a:solidFill>
-                  <a:schemeClr val="tx1"/>
-                </a:solidFill>
-                <a:ea typeface="ＭＳ Ｐゴシック" pitchFamily="34" charset="-128"/>
-              </a:rPr>
-              <a:t>The connection happens in </a:t>
-            </a:r>
-            <a:r>
-              <a:rPr lang="en-US" sz="2000" i="1" dirty="0">
-                <a:solidFill>
-                  <a:schemeClr val="tx1"/>
-                </a:solidFill>
-                <a:ea typeface="ＭＳ Ｐゴシック" pitchFamily="34" charset="-128"/>
-              </a:rPr>
-              <a:t>repeated trials. </a:t>
-            </a:r>
-          </a:p>
-          <a:p>
-            <a:pPr lvl="2" eaLnBrk="1" hangingPunct="1">
-              <a:lnSpc>
-                <a:spcPct val="85000"/>
-              </a:lnSpc>
-              <a:spcAft>
-                <a:spcPts val="1200"/>
-              </a:spcAft>
-              <a:buSzPct val="75000"/>
-            </a:pPr>
-            <a:r>
-              <a:rPr lang="en-US" sz="2000" dirty="0">
-                <a:solidFill>
-                  <a:schemeClr val="tx1"/>
-                </a:solidFill>
-                <a:ea typeface="ＭＳ Ｐゴシック" pitchFamily="34" charset="-128"/>
-              </a:rPr>
-              <a:t>The connection happens under </a:t>
-            </a:r>
-            <a:r>
-              <a:rPr lang="en-US" sz="2000" i="1" dirty="0">
-                <a:solidFill>
-                  <a:schemeClr val="tx1"/>
-                </a:solidFill>
-                <a:ea typeface="ＭＳ Ｐゴシック" pitchFamily="34" charset="-128"/>
-              </a:rPr>
-              <a:t>varying conditions.</a:t>
-            </a:r>
-          </a:p>
-          <a:p>
-            <a:pPr lvl="1" eaLnBrk="1" hangingPunct="1">
-              <a:lnSpc>
-                <a:spcPct val="85000"/>
-              </a:lnSpc>
-              <a:spcAft>
-                <a:spcPts val="1200"/>
-              </a:spcAft>
-              <a:buClr>
-                <a:schemeClr val="accent1"/>
-              </a:buClr>
-            </a:pPr>
-            <a:r>
-              <a:rPr lang="en-US" sz="2000" dirty="0">
-                <a:solidFill>
-                  <a:schemeClr val="tx1"/>
-                </a:solidFill>
-                <a:ea typeface="ＭＳ Ｐゴシック" pitchFamily="34" charset="-128"/>
-              </a:rPr>
-              <a:t>Higher doses are associated with stronger responses.</a:t>
-            </a:r>
-          </a:p>
-          <a:p>
-            <a:pPr lvl="1" eaLnBrk="1" hangingPunct="1">
-              <a:lnSpc>
-                <a:spcPct val="85000"/>
-              </a:lnSpc>
-              <a:spcAft>
-                <a:spcPts val="1200"/>
-              </a:spcAft>
-              <a:buClr>
-                <a:schemeClr val="accent1"/>
-              </a:buClr>
-            </a:pPr>
-            <a:r>
-              <a:rPr lang="en-US" sz="2000" dirty="0">
-                <a:solidFill>
-                  <a:schemeClr val="tx1"/>
-                </a:solidFill>
-                <a:ea typeface="ＭＳ Ｐゴシック" pitchFamily="34" charset="-128"/>
-              </a:rPr>
-              <a:t>Alleged cause </a:t>
-            </a:r>
-            <a:r>
-              <a:rPr lang="en-US" sz="2000" i="1" dirty="0">
-                <a:solidFill>
-                  <a:schemeClr val="tx1"/>
-                </a:solidFill>
-                <a:ea typeface="ＭＳ Ｐゴシック" pitchFamily="34" charset="-128"/>
-              </a:rPr>
-              <a:t>precedes </a:t>
-            </a:r>
-            <a:r>
-              <a:rPr lang="en-US" sz="2000" dirty="0">
-                <a:solidFill>
-                  <a:schemeClr val="tx1"/>
-                </a:solidFill>
-                <a:ea typeface="ＭＳ Ｐゴシック" pitchFamily="34" charset="-128"/>
-              </a:rPr>
-              <a:t>the effect in time.</a:t>
-            </a:r>
-          </a:p>
-          <a:p>
-            <a:pPr lvl="1" eaLnBrk="1" hangingPunct="1">
-              <a:lnSpc>
-                <a:spcPct val="85000"/>
-              </a:lnSpc>
-              <a:spcAft>
-                <a:spcPts val="1200"/>
-              </a:spcAft>
-              <a:buClr>
-                <a:schemeClr val="accent1"/>
-              </a:buClr>
-            </a:pPr>
-            <a:r>
-              <a:rPr lang="en-US" sz="2000" dirty="0">
-                <a:solidFill>
-                  <a:schemeClr val="tx1"/>
-                </a:solidFill>
-                <a:ea typeface="ＭＳ Ｐゴシック" pitchFamily="34" charset="-128"/>
-              </a:rPr>
-              <a:t>Alleged cause is </a:t>
-            </a:r>
-            <a:r>
-              <a:rPr lang="en-US" sz="2000" i="1" dirty="0">
-                <a:solidFill>
-                  <a:schemeClr val="tx1"/>
-                </a:solidFill>
-                <a:ea typeface="ＭＳ Ｐゴシック" pitchFamily="34" charset="-128"/>
-              </a:rPr>
-              <a:t>plausible </a:t>
-            </a:r>
-            <a:r>
-              <a:rPr lang="en-US" sz="2000" dirty="0">
-                <a:solidFill>
-                  <a:schemeClr val="tx1"/>
-                </a:solidFill>
-                <a:ea typeface="ＭＳ Ｐゴシック" pitchFamily="34" charset="-128"/>
-              </a:rPr>
-              <a:t>(reasonable explanation).</a:t>
-            </a:r>
-          </a:p>
-        </p:txBody>
-      </p:sp>
-      <p:pic>
-        <p:nvPicPr>
-          <p:cNvPr id="75778" name="Picture 5" descr="The image on the slide displays a &quot;causation&quot; figure with two variables X(explanatory) and Y(response). A cause and effect link is directed from X to Y and association is shown between X and Y."/>
-          <p:cNvPicPr>
-            <a:picLocks noChangeAspect="1" noChangeArrowheads="1"/>
-          </p:cNvPicPr>
-          <p:nvPr/>
-        </p:nvPicPr>
-        <p:blipFill>
-          <a:blip r:embed="rId3">
-            <a:extLst>
-              <a:ext uri="{28A0092B-C50C-407E-A947-70E740481C1C}">
-                <a14:useLocalDpi xmlns:a14="http://schemas.microsoft.com/office/drawing/2010/main" val="0"/>
-              </a:ext>
-            </a:extLst>
-          </a:blip>
-          <a:srcRect r="70621" b="64716"/>
-          <a:stretch>
-            <a:fillRect/>
-          </a:stretch>
-        </p:blipFill>
-        <p:spPr bwMode="auto">
-          <a:xfrm>
-            <a:off x="6532563" y="2835275"/>
-            <a:ext cx="2479675" cy="1147763"/>
-          </a:xfrm>
-          <a:prstGeom prst="rect">
-            <a:avLst/>
-          </a:prstGeom>
-          <a:noFill/>
-          <a:ln>
-            <a:noFill/>
-          </a:ln>
-          <a:extLst>
-            <a:ext uri="{909E8E84-426E-40DD-AFC4-6F175D3DCCD1}">
-              <a14:hiddenFill xmlns:a14="http://schemas.microsoft.com/office/drawing/2010/main">
-                <a:solidFill>
-                  <a:srgbClr val="FFFFFF"/>
-                </a:solidFill>
-              </a14:hiddenFill>
-            </a:ext>
-            <a:ext uri="{91240B29-F687-4F45-9708-019B960494DF}">
-              <a14:hiddenLine xmlns:a14="http://schemas.microsoft.com/office/drawing/2010/main" w="9525">
-                <a:solidFill>
-                  <a:srgbClr val="000000"/>
-                </a:solidFill>
-                <a:miter lim="800000"/>
-                <a:headEnd/>
-                <a:tailEnd/>
-              </a14:hiddenLine>
-            </a:ext>
-          </a:extLst>
-        </p:spPr>
-      </p:pic>
-    </p:spTree>
-  </p:cSld>
-  <p:clrMapOvr>
-    <a:masterClrMapping/>
-  </p:clrMapOvr>
-  <p:transition spd="med">
-    <p:fade/>
-  </p:transition>
-  <p:timing>
-    <p:tnLst>
-      <p:par>
-        <p:cTn id="1" dur="indefinite" restart="never" nodeType="tmRoot">
-          <p:childTnLst>
-            <p:seq concurrent="1" nextAc="seek">
-              <p:cTn id="2" dur="indefinite" nodeType="mainSeq">
-                <p:childTnLst>
-                  <p:par>
-                    <p:cTn id="3" fill="hold" nodeType="clickPar">
-                      <p:stCondLst>
-                        <p:cond delay="indefinite"/>
-                      </p:stCondLst>
-                      <p:childTnLst>
-                        <p:par>
-                          <p:cTn id="4" fill="hold" nodeType="withGroup">
-                            <p:stCondLst>
-                              <p:cond delay="0"/>
-                            </p:stCondLst>
-                            <p:childTnLst>
-                              <p:par>
-                                <p:cTn id="5" presetID="1" presetClass="entr" presetSubtype="0" fill="hold" grpId="0" nodeType="clickEffect">
-                                  <p:stCondLst>
-                                    <p:cond delay="0"/>
-                                  </p:stCondLst>
-                                  <p:childTnLst>
-                                    <p:set>
-                                      <p:cBhvr>
-                                        <p:cTn id="6" dur="1" fill="hold">
-                                          <p:stCondLst>
-                                            <p:cond delay="499"/>
-                                          </p:stCondLst>
-                                        </p:cTn>
-                                        <p:tgtEl>
-                                          <p:spTgt spid="500739">
-                                            <p:txEl>
-                                              <p:pRg st="0" end="0"/>
-                                            </p:txEl>
-                                          </p:spTgt>
-                                        </p:tgtEl>
-                                        <p:attrNameLst>
-                                          <p:attrName>style.visibility</p:attrName>
-                                        </p:attrNameLst>
-                                      </p:cBhvr>
-                                      <p:to>
-                                        <p:strVal val="visible"/>
-                                      </p:to>
-                                    </p:set>
-                                  </p:childTnLst>
-                                </p:cTn>
-                              </p:par>
-                            </p:childTnLst>
-                          </p:cTn>
-                        </p:par>
-                      </p:childTnLst>
-                    </p:cTn>
-                  </p:par>
-                  <p:par>
-                    <p:cTn id="7" fill="hold" nodeType="clickPar">
-                      <p:stCondLst>
-                        <p:cond delay="indefinite"/>
-                      </p:stCondLst>
-                      <p:childTnLst>
-                        <p:par>
-                          <p:cTn id="8" fill="hold" nodeType="withGroup">
-                            <p:stCondLst>
-                              <p:cond delay="0"/>
-                            </p:stCondLst>
-                            <p:childTnLst>
-                              <p:par>
-                                <p:cTn id="9" presetID="1" presetClass="entr" presetSubtype="0" fill="hold" grpId="0" nodeType="clickEffect">
-                                  <p:stCondLst>
-                                    <p:cond delay="0"/>
-                                  </p:stCondLst>
-                                  <p:childTnLst>
-                                    <p:set>
-                                      <p:cBhvr>
-                                        <p:cTn id="10" dur="1" fill="hold">
-                                          <p:stCondLst>
-                                            <p:cond delay="499"/>
-                                          </p:stCondLst>
-                                        </p:cTn>
-                                        <p:tgtEl>
-                                          <p:spTgt spid="500739">
-                                            <p:txEl>
-                                              <p:pRg st="1" end="1"/>
-                                            </p:txEl>
-                                          </p:spTgt>
-                                        </p:tgtEl>
-                                        <p:attrNameLst>
-                                          <p:attrName>style.visibility</p:attrName>
-                                        </p:attrNameLst>
-                                      </p:cBhvr>
-                                      <p:to>
-                                        <p:strVal val="visible"/>
-                                      </p:to>
-                                    </p:set>
-                                  </p:childTnLst>
-                                </p:cTn>
-                              </p:par>
-                            </p:childTnLst>
-                          </p:cTn>
-                        </p:par>
-                      </p:childTnLst>
-                    </p:cTn>
-                  </p:par>
-                  <p:par>
-                    <p:cTn id="11" fill="hold" nodeType="clickPar">
-                      <p:stCondLst>
-                        <p:cond delay="indefinite"/>
-                      </p:stCondLst>
-                      <p:childTnLst>
-                        <p:par>
-                          <p:cTn id="12" fill="hold" nodeType="withGroup">
-                            <p:stCondLst>
-                              <p:cond delay="0"/>
-                            </p:stCondLst>
-                            <p:childTnLst>
-                              <p:par>
-                                <p:cTn id="13" presetID="1" presetClass="entr" presetSubtype="0" fill="hold" grpId="0" nodeType="clickEffect">
-                                  <p:stCondLst>
-                                    <p:cond delay="0"/>
-                                  </p:stCondLst>
-                                  <p:childTnLst>
-                                    <p:set>
-                                      <p:cBhvr>
-                                        <p:cTn id="14" dur="1" fill="hold">
-                                          <p:stCondLst>
-                                            <p:cond delay="499"/>
-                                          </p:stCondLst>
-                                        </p:cTn>
-                                        <p:tgtEl>
-                                          <p:spTgt spid="500739">
-                                            <p:txEl>
-                                              <p:pRg st="2" end="2"/>
-                                            </p:txEl>
-                                          </p:spTgt>
-                                        </p:tgtEl>
-                                        <p:attrNameLst>
-                                          <p:attrName>style.visibility</p:attrName>
-                                        </p:attrNameLst>
-                                      </p:cBhvr>
-                                      <p:to>
-                                        <p:strVal val="visible"/>
-                                      </p:to>
-                                    </p:set>
-                                  </p:childTnLst>
-                                </p:cTn>
-                              </p:par>
-                            </p:childTnLst>
-                          </p:cTn>
-                        </p:par>
-                      </p:childTnLst>
-                    </p:cTn>
-                  </p:par>
-                  <p:par>
-                    <p:cTn id="15" fill="hold" nodeType="clickPar">
-                      <p:stCondLst>
-                        <p:cond delay="indefinite"/>
-                      </p:stCondLst>
-                      <p:childTnLst>
-                        <p:par>
-                          <p:cTn id="16" fill="hold" nodeType="withGroup">
-                            <p:stCondLst>
-                              <p:cond delay="0"/>
-                            </p:stCondLst>
-                            <p:childTnLst>
-                              <p:par>
-                                <p:cTn id="17" presetID="1" presetClass="entr" presetSubtype="0" fill="hold" grpId="0" nodeType="clickEffect">
-                                  <p:stCondLst>
-                                    <p:cond delay="0"/>
-                                  </p:stCondLst>
-                                  <p:childTnLst>
-                                    <p:set>
-                                      <p:cBhvr>
-                                        <p:cTn id="18" dur="1" fill="hold">
-                                          <p:stCondLst>
-                                            <p:cond delay="499"/>
-                                          </p:stCondLst>
-                                        </p:cTn>
-                                        <p:tgtEl>
-                                          <p:spTgt spid="500739">
-                                            <p:txEl>
-                                              <p:pRg st="3" end="3"/>
-                                            </p:txEl>
-                                          </p:spTgt>
-                                        </p:tgtEl>
-                                        <p:attrNameLst>
-                                          <p:attrName>style.visibility</p:attrName>
-                                        </p:attrNameLst>
-                                      </p:cBhvr>
-                                      <p:to>
-                                        <p:strVal val="visible"/>
-                                      </p:to>
-                                    </p:set>
-                                  </p:childTnLst>
-                                </p:cTn>
-                              </p:par>
-                              <p:par>
-                                <p:cTn id="19" presetID="1" presetClass="entr" presetSubtype="0" fill="hold" grpId="0" nodeType="withEffect">
-                                  <p:stCondLst>
-                                    <p:cond delay="0"/>
-                                  </p:stCondLst>
-                                  <p:childTnLst>
-                                    <p:set>
-                                      <p:cBhvr>
-                                        <p:cTn id="20" dur="1" fill="hold">
-                                          <p:stCondLst>
-                                            <p:cond delay="499"/>
-                                          </p:stCondLst>
-                                        </p:cTn>
-                                        <p:tgtEl>
-                                          <p:spTgt spid="500739">
-                                            <p:txEl>
-                                              <p:pRg st="4" end="4"/>
-                                            </p:txEl>
-                                          </p:spTgt>
-                                        </p:tgtEl>
-                                        <p:attrNameLst>
-                                          <p:attrName>style.visibility</p:attrName>
-                                        </p:attrNameLst>
-                                      </p:cBhvr>
-                                      <p:to>
-                                        <p:strVal val="visible"/>
-                                      </p:to>
-                                    </p:set>
-                                  </p:childTnLst>
-                                </p:cTn>
-                              </p:par>
-                              <p:par>
-                                <p:cTn id="21" presetID="1" presetClass="entr" presetSubtype="0" fill="hold" grpId="0" nodeType="withEffect">
-                                  <p:stCondLst>
-                                    <p:cond delay="0"/>
-                                  </p:stCondLst>
-                                  <p:childTnLst>
-                                    <p:set>
-                                      <p:cBhvr>
-                                        <p:cTn id="22" dur="1" fill="hold">
-                                          <p:stCondLst>
-                                            <p:cond delay="499"/>
-                                          </p:stCondLst>
-                                        </p:cTn>
-                                        <p:tgtEl>
-                                          <p:spTgt spid="500739">
-                                            <p:txEl>
-                                              <p:pRg st="5" end="5"/>
-                                            </p:txEl>
-                                          </p:spTgt>
-                                        </p:tgtEl>
-                                        <p:attrNameLst>
-                                          <p:attrName>style.visibility</p:attrName>
-                                        </p:attrNameLst>
-                                      </p:cBhvr>
-                                      <p:to>
-                                        <p:strVal val="visible"/>
-                                      </p:to>
-                                    </p:set>
-                                  </p:childTnLst>
-                                </p:cTn>
-                              </p:par>
-                            </p:childTnLst>
-                          </p:cTn>
-                        </p:par>
-                      </p:childTnLst>
-                    </p:cTn>
-                  </p:par>
-                  <p:par>
-                    <p:cTn id="23" fill="hold" nodeType="clickPar">
-                      <p:stCondLst>
-                        <p:cond delay="indefinite"/>
-                      </p:stCondLst>
-                      <p:childTnLst>
-                        <p:par>
-                          <p:cTn id="24" fill="hold" nodeType="withGroup">
-                            <p:stCondLst>
-                              <p:cond delay="0"/>
-                            </p:stCondLst>
-                            <p:childTnLst>
-                              <p:par>
-                                <p:cTn id="25" presetID="1" presetClass="entr" presetSubtype="0" fill="hold" grpId="0" nodeType="clickEffect">
-                                  <p:stCondLst>
-                                    <p:cond delay="0"/>
-                                  </p:stCondLst>
-                                  <p:childTnLst>
-                                    <p:set>
-                                      <p:cBhvr>
-                                        <p:cTn id="26" dur="1" fill="hold">
-                                          <p:stCondLst>
-                                            <p:cond delay="499"/>
-                                          </p:stCondLst>
-                                        </p:cTn>
-                                        <p:tgtEl>
-                                          <p:spTgt spid="500739">
-                                            <p:txEl>
-                                              <p:pRg st="6" end="6"/>
-                                            </p:txEl>
-                                          </p:spTgt>
-                                        </p:tgtEl>
-                                        <p:attrNameLst>
-                                          <p:attrName>style.visibility</p:attrName>
-                                        </p:attrNameLst>
-                                      </p:cBhvr>
-                                      <p:to>
-                                        <p:strVal val="visible"/>
-                                      </p:to>
-                                    </p:set>
-                                  </p:childTnLst>
-                                </p:cTn>
-                              </p:par>
-                            </p:childTnLst>
-                          </p:cTn>
-                        </p:par>
-                      </p:childTnLst>
-                    </p:cTn>
-                  </p:par>
-                  <p:par>
-                    <p:cTn id="27" fill="hold" nodeType="clickPar">
-                      <p:stCondLst>
-                        <p:cond delay="indefinite"/>
-                      </p:stCondLst>
-                      <p:childTnLst>
-                        <p:par>
-                          <p:cTn id="28" fill="hold" nodeType="withGroup">
-                            <p:stCondLst>
-                              <p:cond delay="0"/>
-                            </p:stCondLst>
-                            <p:childTnLst>
-                              <p:par>
-                                <p:cTn id="29" presetID="1" presetClass="entr" presetSubtype="0" fill="hold" grpId="0" nodeType="clickEffect">
-                                  <p:stCondLst>
-                                    <p:cond delay="0"/>
-                                  </p:stCondLst>
-                                  <p:childTnLst>
-                                    <p:set>
-                                      <p:cBhvr>
-                                        <p:cTn id="30" dur="1" fill="hold">
-                                          <p:stCondLst>
-                                            <p:cond delay="499"/>
-                                          </p:stCondLst>
-                                        </p:cTn>
-                                        <p:tgtEl>
-                                          <p:spTgt spid="500739">
-                                            <p:txEl>
-                                              <p:pRg st="7" end="7"/>
-                                            </p:txEl>
-                                          </p:spTgt>
-                                        </p:tgtEl>
-                                        <p:attrNameLst>
-                                          <p:attrName>style.visibility</p:attrName>
-                                        </p:attrNameLst>
-                                      </p:cBhvr>
-                                      <p:to>
-                                        <p:strVal val="visible"/>
-                                      </p:to>
-                                    </p:set>
-                                  </p:childTnLst>
-                                </p:cTn>
-                              </p:par>
-                            </p:childTnLst>
-                          </p:cTn>
-                        </p:par>
-                      </p:childTnLst>
-                    </p:cTn>
-                  </p:par>
-                  <p:par>
-                    <p:cTn id="31" fill="hold" nodeType="clickPar">
-                      <p:stCondLst>
-                        <p:cond delay="indefinite"/>
-                      </p:stCondLst>
-                      <p:childTnLst>
-                        <p:par>
-                          <p:cTn id="32" fill="hold" nodeType="withGroup">
-                            <p:stCondLst>
-                              <p:cond delay="0"/>
-                            </p:stCondLst>
-                            <p:childTnLst>
-                              <p:par>
-                                <p:cTn id="33" presetID="1" presetClass="entr" presetSubtype="0" fill="hold" grpId="0" nodeType="clickEffect">
-                                  <p:stCondLst>
-                                    <p:cond delay="0"/>
-                                  </p:stCondLst>
-                                  <p:childTnLst>
-                                    <p:set>
-                                      <p:cBhvr>
-                                        <p:cTn id="34" dur="1" fill="hold">
-                                          <p:stCondLst>
-                                            <p:cond delay="499"/>
-                                          </p:stCondLst>
-                                        </p:cTn>
-                                        <p:tgtEl>
-                                          <p:spTgt spid="500739">
-                                            <p:txEl>
-                                              <p:pRg st="8" end="8"/>
-                                            </p:txEl>
-                                          </p:spTgt>
-                                        </p:tgtEl>
-                                        <p:attrNameLst>
-                                          <p:attrName>style.visibility</p:attrName>
-                                        </p:attrNameLst>
-                                      </p:cBhvr>
-                                      <p:to>
-                                        <p:strVal val="visible"/>
-                                      </p:to>
-                                    </p:set>
-                                  </p:childTnLst>
-                                </p:cTn>
-                              </p:par>
-                            </p:childTnLst>
-                          </p:cTn>
-                        </p:par>
-                      </p:childTnLst>
-                    </p:cTn>
-                  </p:par>
-                </p:childTnLst>
-              </p:cTn>
-              <p:prevCondLst>
-                <p:cond evt="onPrev" delay="0">
-                  <p:tgtEl>
-                    <p:sldTgt/>
-                  </p:tgtEl>
-                </p:cond>
-              </p:prevCondLst>
-              <p:nextCondLst>
-                <p:cond evt="onNext" delay="0">
-                  <p:tgtEl>
-                    <p:sldTgt/>
-                  </p:tgtEl>
-                </p:cond>
-              </p:nextCondLst>
-            </p:seq>
-          </p:childTnLst>
-        </p:cTn>
-      </p:par>
-    </p:tnLst>
-    <p:bldLst>
-      <p:bldP spid="500739" grpId="0" build="p" bldLvl="2" autoUpdateAnimBg="0"/>
-    </p:bldLst>
-  </p:timing>
-</p:sld>
-</file>
-
-<file path=ppt/slides/slide23.xml><?xml version="1.0" encoding="utf-8"?>
 <p:sld xmlns:a="http://schemas.openxmlformats.org/drawingml/2006/main" xmlns:r="http://schemas.openxmlformats.org/officeDocument/2006/relationships" xmlns:p="http://schemas.openxmlformats.org/presentationml/2006/main">
   <p:cSld>
     <p:spTree>
@@ -24420,7 +22840,7 @@
                 </a:solidFill>
               </a:rPr>
               <a:pPr/>
-              <a:t>23</a:t>
+              <a:t>22</a:t>
             </a:fld>
             <a:endParaRPr lang="en-US">
               <a:solidFill>
@@ -25731,8 +24151,8 @@
           </a:p>
         </p:txBody>
       </p:sp>
-      <mc:AlternateContent xmlns:mc="http://schemas.openxmlformats.org/markup-compatibility/2006">
-        <mc:Choice xmlns:a14="http://schemas.microsoft.com/office/drawing/2010/main" Requires="a14">
+      <mc:AlternateContent xmlns:mc="http://schemas.openxmlformats.org/markup-compatibility/2006" xmlns:a14="http://schemas.microsoft.com/office/drawing/2010/main">
+        <mc:Choice Requires="a14">
           <p:sp>
             <p:nvSpPr>
               <p:cNvPr id="8" name="TextBox 7" descr="y-hat equals b sub 0 plus b sub 1 x"/>
@@ -25853,7 +24273,7 @@
             </p:txBody>
           </p:sp>
         </mc:Choice>
-        <mc:Fallback>
+        <mc:Fallback xmlns="">
           <p:sp>
             <p:nvSpPr>
               <p:cNvPr id="8" name="TextBox 7" descr="y-hat equals b sub 0 plus b sub 1 x"/>
@@ -25892,8 +24312,8 @@
           </p:sp>
         </mc:Fallback>
       </mc:AlternateContent>
-      <mc:AlternateContent xmlns:mc="http://schemas.openxmlformats.org/markup-compatibility/2006">
-        <mc:Choice xmlns:a14="http://schemas.microsoft.com/office/drawing/2010/main" Requires="a14">
+      <mc:AlternateContent xmlns:mc="http://schemas.openxmlformats.org/markup-compatibility/2006" xmlns:a14="http://schemas.microsoft.com/office/drawing/2010/main">
+        <mc:Choice Requires="a14">
           <p:sp>
             <p:nvSpPr>
               <p:cNvPr id="462856" name="Rectangle 8"/>
@@ -26298,7 +24718,7 @@
             </p:txBody>
           </p:sp>
         </mc:Choice>
-        <mc:Fallback>
+        <mc:Fallback xmlns="">
           <p:sp>
             <p:nvSpPr>
               <p:cNvPr id="462856" name="Rectangle 8"/>
@@ -26828,9 +25248,9 @@
         <p:grpSpPr>
           <a:xfrm>
             <a:off x="622671" y="2389466"/>
-            <a:ext cx="7661275" cy="2717732"/>
+            <a:ext cx="7661275" cy="4043671"/>
             <a:chOff x="622990" y="2525674"/>
-            <a:chExt cx="7660640" cy="2718365"/>
+            <a:chExt cx="7660640" cy="4044613"/>
           </a:xfrm>
           <a:effectLst>
             <a:outerShdw blurRad="50800" dist="38100" dir="2700000">
@@ -26853,7 +25273,7 @@
               <p:spPr bwMode="auto">
                 <a:xfrm>
                   <a:off x="622990" y="2525674"/>
-                  <a:ext cx="7660640" cy="2718365"/>
+                  <a:ext cx="7660640" cy="4044613"/>
                 </a:xfrm>
                 <a:prstGeom prst="rect">
                   <a:avLst/>
@@ -27109,7 +25529,7 @@
                                 <m:d>
                                   <m:dPr>
                                     <m:ctrlPr>
-                                      <a:rPr lang="en-US" sz="2000" b="0" i="1" smtClean="0">
+                                      <a:rPr lang="en-US" sz="2000" i="1">
                                         <a:latin typeface="Cambria Math" panose="02040503050406030204" pitchFamily="18" charset="0"/>
                                         <a:ea typeface="ＭＳ Ｐゴシック" pitchFamily="-84" charset="-128"/>
                                         <a:cs typeface="Arial" charset="0"/>
@@ -27348,7 +25768,7 @@
                       <m:sSub>
                         <m:sSubPr>
                           <m:ctrlPr>
-                            <a:rPr lang="en-US" sz="2000" i="1" smtClean="0">
+                            <a:rPr lang="en-US" sz="2000" b="0" i="1" smtClean="0">
                               <a:solidFill>
                                 <a:schemeClr val="tx1"/>
                               </a:solidFill>
@@ -27552,8 +25972,502 @@
                       <a:ea typeface="ＭＳ Ｐゴシック" pitchFamily="-84" charset="-128"/>
                       <a:cs typeface="Arial" charset="0"/>
                     </a:rPr>
-                    <a:t>.</a:t>
+                    <a:t>. Hence </a:t>
                   </a:r>
+                </a:p>
+                <a:p>
+                  <a:pPr defTabSz="914400" eaLnBrk="1" hangingPunct="1">
+                    <a:spcBef>
+                      <a:spcPct val="40000"/>
+                    </a:spcBef>
+                    <a:buClr>
+                      <a:schemeClr val="accent1"/>
+                    </a:buClr>
+                    <a:buSzPct val="70000"/>
+                    <a:defRPr/>
+                  </a:pPr>
+                  <a14:m>
+                    <m:oMathPara xmlns:m="http://schemas.openxmlformats.org/officeDocument/2006/math">
+                      <m:oMath>
+                        <m:sSub>
+                          <m:sSubPr>
+                            <m:ctrlPr>
+                              <a:rPr lang="en-US" sz="2000" i="1">
+                                <a:solidFill>
+                                  <a:srgbClr val="FF0000"/>
+                                </a:solidFill>
+                                <a:latin typeface="Cambria Math" panose="02040503050406030204" pitchFamily="18" charset="0"/>
+                              </a:rPr>
+                            </m:ctrlPr>
+                          </m:sSubPr>
+                          <m:e>
+                            <m:r>
+                              <a:rPr lang="en-US" sz="2000" i="1">
+                                <a:solidFill>
+                                  <a:srgbClr val="FF0000"/>
+                                </a:solidFill>
+                                <a:latin typeface="Cambria Math" panose="02040503050406030204" pitchFamily="18" charset="0"/>
+                              </a:rPr>
+                              <m:t>𝑏</m:t>
+                            </m:r>
+                          </m:e>
+                          <m:sub>
+                            <m:r>
+                              <a:rPr lang="en-US" sz="2000" i="1">
+                                <a:solidFill>
+                                  <a:srgbClr val="FF0000"/>
+                                </a:solidFill>
+                                <a:latin typeface="Cambria Math" panose="02040503050406030204" pitchFamily="18" charset="0"/>
+                              </a:rPr>
+                              <m:t>1</m:t>
+                            </m:r>
+                          </m:sub>
+                        </m:sSub>
+                        <m:r>
+                          <a:rPr lang="en-US" sz="2000" i="1">
+                            <a:solidFill>
+                              <a:srgbClr val="FF0000"/>
+                            </a:solidFill>
+                            <a:latin typeface="Cambria Math" panose="02040503050406030204" pitchFamily="18" charset="0"/>
+                          </a:rPr>
+                          <m:t>=</m:t>
+                        </m:r>
+                        <m:sSub>
+                          <m:sSubPr>
+                            <m:ctrlPr>
+                              <a:rPr lang="en-US" sz="2000" i="1">
+                                <a:solidFill>
+                                  <a:srgbClr val="FF0000"/>
+                                </a:solidFill>
+                                <a:latin typeface="Cambria Math" panose="02040503050406030204" pitchFamily="18" charset="0"/>
+                              </a:rPr>
+                            </m:ctrlPr>
+                          </m:sSubPr>
+                          <m:e>
+                            <m:r>
+                              <a:rPr lang="en-US" sz="2000" i="1">
+                                <a:solidFill>
+                                  <a:srgbClr val="FF0000"/>
+                                </a:solidFill>
+                                <a:latin typeface="Cambria Math" panose="02040503050406030204" pitchFamily="18" charset="0"/>
+                              </a:rPr>
+                              <m:t>𝑟</m:t>
+                            </m:r>
+                          </m:e>
+                          <m:sub>
+                            <m:r>
+                              <a:rPr lang="en-US" sz="2000" i="1">
+                                <a:solidFill>
+                                  <a:srgbClr val="FF0000"/>
+                                </a:solidFill>
+                                <a:latin typeface="Cambria Math" panose="02040503050406030204" pitchFamily="18" charset="0"/>
+                              </a:rPr>
+                              <m:t>𝑥</m:t>
+                            </m:r>
+                            <m:r>
+                              <a:rPr lang="en-US" sz="2000" i="1">
+                                <a:solidFill>
+                                  <a:srgbClr val="FF0000"/>
+                                </a:solidFill>
+                                <a:latin typeface="Cambria Math" panose="02040503050406030204" pitchFamily="18" charset="0"/>
+                              </a:rPr>
+                              <m:t>,</m:t>
+                            </m:r>
+                            <m:r>
+                              <a:rPr lang="en-US" sz="2000" i="1">
+                                <a:solidFill>
+                                  <a:srgbClr val="FF0000"/>
+                                </a:solidFill>
+                                <a:latin typeface="Cambria Math" panose="02040503050406030204" pitchFamily="18" charset="0"/>
+                              </a:rPr>
+                              <m:t>𝑦</m:t>
+                            </m:r>
+                          </m:sub>
+                        </m:sSub>
+                        <m:r>
+                          <a:rPr lang="en-US" sz="2000" i="1">
+                            <a:solidFill>
+                              <a:srgbClr val="FF0000"/>
+                            </a:solidFill>
+                            <a:latin typeface="Cambria Math" panose="02040503050406030204" pitchFamily="18" charset="0"/>
+                          </a:rPr>
+                          <m:t>⋅</m:t>
+                        </m:r>
+                        <m:f>
+                          <m:fPr>
+                            <m:ctrlPr>
+                              <a:rPr lang="en-US" sz="2000" i="1">
+                                <a:solidFill>
+                                  <a:srgbClr val="FF0000"/>
+                                </a:solidFill>
+                                <a:latin typeface="Cambria Math" panose="02040503050406030204" pitchFamily="18" charset="0"/>
+                              </a:rPr>
+                            </m:ctrlPr>
+                          </m:fPr>
+                          <m:num>
+                            <m:sSub>
+                              <m:sSubPr>
+                                <m:ctrlPr>
+                                  <a:rPr lang="en-US" sz="2000" i="1">
+                                    <a:solidFill>
+                                      <a:srgbClr val="FF0000"/>
+                                    </a:solidFill>
+                                    <a:latin typeface="Cambria Math" panose="02040503050406030204" pitchFamily="18" charset="0"/>
+                                  </a:rPr>
+                                </m:ctrlPr>
+                              </m:sSubPr>
+                              <m:e>
+                                <m:r>
+                                  <a:rPr lang="en-US" sz="2000" i="1">
+                                    <a:solidFill>
+                                      <a:srgbClr val="FF0000"/>
+                                    </a:solidFill>
+                                    <a:latin typeface="Cambria Math" panose="02040503050406030204" pitchFamily="18" charset="0"/>
+                                  </a:rPr>
+                                  <m:t>𝑠</m:t>
+                                </m:r>
+                              </m:e>
+                              <m:sub>
+                                <m:r>
+                                  <a:rPr lang="en-US" sz="2000" i="1">
+                                    <a:solidFill>
+                                      <a:srgbClr val="FF0000"/>
+                                    </a:solidFill>
+                                    <a:latin typeface="Cambria Math" panose="02040503050406030204" pitchFamily="18" charset="0"/>
+                                  </a:rPr>
+                                  <m:t>𝑦</m:t>
+                                </m:r>
+                              </m:sub>
+                            </m:sSub>
+                          </m:num>
+                          <m:den>
+                            <m:sSub>
+                              <m:sSubPr>
+                                <m:ctrlPr>
+                                  <a:rPr lang="en-US" sz="2000" i="1">
+                                    <a:solidFill>
+                                      <a:srgbClr val="FF0000"/>
+                                    </a:solidFill>
+                                    <a:latin typeface="Cambria Math" panose="02040503050406030204" pitchFamily="18" charset="0"/>
+                                  </a:rPr>
+                                </m:ctrlPr>
+                              </m:sSubPr>
+                              <m:e>
+                                <m:r>
+                                  <a:rPr lang="en-US" sz="2000" i="1">
+                                    <a:solidFill>
+                                      <a:srgbClr val="FF0000"/>
+                                    </a:solidFill>
+                                    <a:latin typeface="Cambria Math" panose="02040503050406030204" pitchFamily="18" charset="0"/>
+                                  </a:rPr>
+                                  <m:t>𝑠</m:t>
+                                </m:r>
+                              </m:e>
+                              <m:sub>
+                                <m:r>
+                                  <a:rPr lang="en-US" sz="2000" i="1">
+                                    <a:solidFill>
+                                      <a:srgbClr val="FF0000"/>
+                                    </a:solidFill>
+                                    <a:latin typeface="Cambria Math" panose="02040503050406030204" pitchFamily="18" charset="0"/>
+                                  </a:rPr>
+                                  <m:t>𝑥</m:t>
+                                </m:r>
+                              </m:sub>
+                            </m:sSub>
+                          </m:den>
+                        </m:f>
+                      </m:oMath>
+                    </m:oMathPara>
+                  </a14:m>
+                  <a:endParaRPr lang="en-US" sz="2000" dirty="0">
+                    <a:latin typeface="Arial" charset="0"/>
+                    <a:ea typeface="ＭＳ Ｐゴシック" pitchFamily="-84" charset="-128"/>
+                    <a:cs typeface="Arial" charset="0"/>
+                  </a:endParaRPr>
+                </a:p>
+                <a:p>
+                  <a:pPr defTabSz="914400" eaLnBrk="1" hangingPunct="1">
+                    <a:spcBef>
+                      <a:spcPct val="40000"/>
+                    </a:spcBef>
+                    <a:buClr>
+                      <a:schemeClr val="accent1"/>
+                    </a:buClr>
+                    <a:buSzPct val="70000"/>
+                    <a:defRPr/>
+                  </a:pPr>
+                  <a14:m>
+                    <m:oMathPara xmlns:m="http://schemas.openxmlformats.org/officeDocument/2006/math">
+                      <m:oMath>
+                        <m:sSub>
+                          <m:sSubPr>
+                            <m:ctrlPr>
+                              <a:rPr lang="en-US" sz="2000" i="1">
+                                <a:solidFill>
+                                  <a:srgbClr val="FF0000"/>
+                                </a:solidFill>
+                                <a:latin typeface="Cambria Math" panose="02040503050406030204" pitchFamily="18" charset="0"/>
+                              </a:rPr>
+                            </m:ctrlPr>
+                          </m:sSubPr>
+                          <m:e>
+                            <m:r>
+                              <a:rPr lang="en-US" sz="2000" i="1">
+                                <a:solidFill>
+                                  <a:srgbClr val="FF0000"/>
+                                </a:solidFill>
+                                <a:latin typeface="Cambria Math" panose="02040503050406030204" pitchFamily="18" charset="0"/>
+                              </a:rPr>
+                              <m:t>𝑏</m:t>
+                            </m:r>
+                          </m:e>
+                          <m:sub>
+                            <m:r>
+                              <a:rPr lang="en-US" sz="2000" i="1">
+                                <a:solidFill>
+                                  <a:srgbClr val="FF0000"/>
+                                </a:solidFill>
+                                <a:latin typeface="Cambria Math" panose="02040503050406030204" pitchFamily="18" charset="0"/>
+                              </a:rPr>
+                              <m:t>0</m:t>
+                            </m:r>
+                          </m:sub>
+                        </m:sSub>
+                        <m:r>
+                          <a:rPr lang="en-US" sz="2000" i="1">
+                            <a:solidFill>
+                              <a:srgbClr val="FF0000"/>
+                            </a:solidFill>
+                            <a:latin typeface="Cambria Math" panose="02040503050406030204" pitchFamily="18" charset="0"/>
+                          </a:rPr>
+                          <m:t>=</m:t>
+                        </m:r>
+                        <m:acc>
+                          <m:accPr>
+                            <m:chr m:val="̅"/>
+                            <m:ctrlPr>
+                              <a:rPr lang="en-US" sz="2000" i="1">
+                                <a:solidFill>
+                                  <a:srgbClr val="FF0000"/>
+                                </a:solidFill>
+                                <a:latin typeface="Cambria Math" panose="02040503050406030204" pitchFamily="18" charset="0"/>
+                              </a:rPr>
+                            </m:ctrlPr>
+                          </m:accPr>
+                          <m:e>
+                            <m:r>
+                              <a:rPr lang="en-US" sz="2000" i="1">
+                                <a:solidFill>
+                                  <a:srgbClr val="FF0000"/>
+                                </a:solidFill>
+                                <a:latin typeface="Cambria Math" panose="02040503050406030204" pitchFamily="18" charset="0"/>
+                              </a:rPr>
+                              <m:t>𝑦</m:t>
+                            </m:r>
+                          </m:e>
+                        </m:acc>
+                        <m:r>
+                          <a:rPr lang="en-US" sz="2000" i="1">
+                            <a:solidFill>
+                              <a:srgbClr val="FF0000"/>
+                            </a:solidFill>
+                            <a:latin typeface="Cambria Math" panose="02040503050406030204" pitchFamily="18" charset="0"/>
+                          </a:rPr>
+                          <m:t>−</m:t>
+                        </m:r>
+                        <m:sSub>
+                          <m:sSubPr>
+                            <m:ctrlPr>
+                              <a:rPr lang="en-US" sz="2000" i="1">
+                                <a:solidFill>
+                                  <a:srgbClr val="FF0000"/>
+                                </a:solidFill>
+                                <a:latin typeface="Cambria Math" panose="02040503050406030204" pitchFamily="18" charset="0"/>
+                              </a:rPr>
+                            </m:ctrlPr>
+                          </m:sSubPr>
+                          <m:e>
+                            <m:r>
+                              <a:rPr lang="en-US" sz="2000" i="1">
+                                <a:solidFill>
+                                  <a:srgbClr val="FF0000"/>
+                                </a:solidFill>
+                                <a:latin typeface="Cambria Math" panose="02040503050406030204" pitchFamily="18" charset="0"/>
+                              </a:rPr>
+                              <m:t>𝑏</m:t>
+                            </m:r>
+                          </m:e>
+                          <m:sub>
+                            <m:r>
+                              <a:rPr lang="en-US" sz="2000" i="1">
+                                <a:solidFill>
+                                  <a:srgbClr val="FF0000"/>
+                                </a:solidFill>
+                                <a:latin typeface="Cambria Math" panose="02040503050406030204" pitchFamily="18" charset="0"/>
+                              </a:rPr>
+                              <m:t>1</m:t>
+                            </m:r>
+                          </m:sub>
+                        </m:sSub>
+                        <m:acc>
+                          <m:accPr>
+                            <m:chr m:val="̅"/>
+                            <m:ctrlPr>
+                              <a:rPr lang="en-US" sz="2000" i="1">
+                                <a:solidFill>
+                                  <a:srgbClr val="FF0000"/>
+                                </a:solidFill>
+                                <a:latin typeface="Cambria Math" panose="02040503050406030204" pitchFamily="18" charset="0"/>
+                              </a:rPr>
+                            </m:ctrlPr>
+                          </m:accPr>
+                          <m:e>
+                            <m:r>
+                              <a:rPr lang="en-US" sz="2000" i="1">
+                                <a:solidFill>
+                                  <a:srgbClr val="FF0000"/>
+                                </a:solidFill>
+                                <a:latin typeface="Cambria Math" panose="02040503050406030204" pitchFamily="18" charset="0"/>
+                              </a:rPr>
+                              <m:t>𝑥</m:t>
+                            </m:r>
+                          </m:e>
+                        </m:acc>
+                      </m:oMath>
+                    </m:oMathPara>
+                  </a14:m>
+                  <a:endParaRPr lang="en-US" sz="2000" dirty="0">
+                    <a:latin typeface="Arial" charset="0"/>
+                    <a:ea typeface="ＭＳ Ｐゴシック" pitchFamily="-84" charset="-128"/>
+                    <a:cs typeface="Arial" charset="0"/>
+                  </a:endParaRPr>
+                </a:p>
+                <a:p>
+                  <a:pPr defTabSz="914400" eaLnBrk="1" hangingPunct="1">
+                    <a:spcBef>
+                      <a:spcPct val="40000"/>
+                    </a:spcBef>
+                    <a:buClr>
+                      <a:schemeClr val="accent1"/>
+                    </a:buClr>
+                    <a:buSzPct val="70000"/>
+                    <a:defRPr/>
+                  </a:pPr>
+                  <a:r>
+                    <a:rPr lang="en-US" sz="2000" dirty="0">
+                      <a:latin typeface="Arial" charset="0"/>
+                      <a:ea typeface="ＭＳ Ｐゴシック" pitchFamily="-84" charset="-128"/>
+                      <a:cs typeface="Arial" charset="0"/>
+                    </a:rPr>
+                    <a:t>where </a:t>
+                  </a:r>
+                  <a14:m>
+                    <m:oMath xmlns:m="http://schemas.openxmlformats.org/officeDocument/2006/math">
+                      <m:sSub>
+                        <m:sSubPr>
+                          <m:ctrlPr>
+                            <a:rPr lang="en-US" sz="2000" i="1">
+                              <a:latin typeface="Cambria Math" panose="02040503050406030204" pitchFamily="18" charset="0"/>
+                            </a:rPr>
+                          </m:ctrlPr>
+                        </m:sSubPr>
+                        <m:e>
+                          <m:r>
+                            <a:rPr lang="en-US" sz="2000" i="1">
+                              <a:latin typeface="Cambria Math" panose="02040503050406030204" pitchFamily="18" charset="0"/>
+                            </a:rPr>
+                            <m:t>𝑟</m:t>
+                          </m:r>
+                        </m:e>
+                        <m:sub>
+                          <m:r>
+                            <a:rPr lang="en-US" sz="2000" i="1">
+                              <a:latin typeface="Cambria Math" panose="02040503050406030204" pitchFamily="18" charset="0"/>
+                            </a:rPr>
+                            <m:t>𝑥</m:t>
+                          </m:r>
+                          <m:r>
+                            <a:rPr lang="en-US" sz="2000" i="1">
+                              <a:latin typeface="Cambria Math" panose="02040503050406030204" pitchFamily="18" charset="0"/>
+                            </a:rPr>
+                            <m:t>,</m:t>
+                          </m:r>
+                          <m:r>
+                            <a:rPr lang="en-US" sz="2000" i="1">
+                              <a:latin typeface="Cambria Math" panose="02040503050406030204" pitchFamily="18" charset="0"/>
+                            </a:rPr>
+                            <m:t>𝑦</m:t>
+                          </m:r>
+                        </m:sub>
+                      </m:sSub>
+                    </m:oMath>
+                  </a14:m>
+                  <a:r>
+                    <a:rPr lang="en-US" altLang="en-US" sz="2000" dirty="0">
+                      <a:solidFill>
+                        <a:srgbClr val="000000"/>
+                      </a:solidFill>
+                      <a:ea typeface="ＭＳ Ｐゴシック" pitchFamily="-65" charset="-128"/>
+                      <a:cs typeface="Arial" charset="0"/>
+                    </a:rPr>
+                    <a:t> is the correlation coefficient between </a:t>
+                  </a:r>
+                  <a14:m>
+                    <m:oMath xmlns:m="http://schemas.openxmlformats.org/officeDocument/2006/math">
+                      <m:r>
+                        <a:rPr lang="en-US" altLang="en-US" sz="2000" i="1">
+                          <a:solidFill>
+                            <a:srgbClr val="000000"/>
+                          </a:solidFill>
+                          <a:latin typeface="Cambria Math" panose="02040503050406030204" pitchFamily="18" charset="0"/>
+                          <a:ea typeface="ＭＳ Ｐゴシック" pitchFamily="-65" charset="-128"/>
+                          <a:cs typeface="Arial" charset="0"/>
+                        </a:rPr>
+                        <m:t>𝑥</m:t>
+                      </m:r>
+                    </m:oMath>
+                  </a14:m>
+                  <a:r>
+                    <a:rPr lang="en-US" altLang="en-US" sz="2000" dirty="0">
+                      <a:solidFill>
+                        <a:srgbClr val="000000"/>
+                      </a:solidFill>
+                      <a:ea typeface="ＭＳ Ｐゴシック" pitchFamily="-65" charset="-128"/>
+                      <a:cs typeface="Arial" charset="0"/>
+                    </a:rPr>
+                    <a:t> and </a:t>
+                  </a:r>
+                  <a14:m>
+                    <m:oMath xmlns:m="http://schemas.openxmlformats.org/officeDocument/2006/math">
+                      <m:r>
+                        <a:rPr lang="en-US" altLang="en-US" sz="2000" i="1">
+                          <a:solidFill>
+                            <a:srgbClr val="000000"/>
+                          </a:solidFill>
+                          <a:latin typeface="Cambria Math" panose="02040503050406030204" pitchFamily="18" charset="0"/>
+                          <a:ea typeface="ＭＳ Ｐゴシック" pitchFamily="-65" charset="-128"/>
+                          <a:cs typeface="Arial" charset="0"/>
+                        </a:rPr>
+                        <m:t>𝑦</m:t>
+                      </m:r>
+                    </m:oMath>
+                  </a14:m>
+                  <a:r>
+                    <a:rPr lang="en-US" altLang="en-US" sz="2000" dirty="0">
+                      <a:solidFill>
+                        <a:srgbClr val="000000"/>
+                      </a:solidFill>
+                      <a:ea typeface="ＭＳ Ｐゴシック" pitchFamily="-65" charset="-128"/>
+                      <a:cs typeface="Arial" charset="0"/>
+                    </a:rPr>
+                    <a:t>. </a:t>
+                  </a:r>
+                  <a:endParaRPr lang="en-US" sz="2000" dirty="0">
+                    <a:latin typeface="Arial" charset="0"/>
+                    <a:ea typeface="ＭＳ Ｐゴシック" pitchFamily="-84" charset="-128"/>
+                    <a:cs typeface="Arial" charset="0"/>
+                  </a:endParaRPr>
                 </a:p>
               </p:txBody>
             </p:sp>
@@ -27570,7 +26484,7 @@
               <p:spPr bwMode="auto">
                 <a:xfrm>
                   <a:off x="622990" y="2525674"/>
-                  <a:ext cx="7660640" cy="2718365"/>
+                  <a:ext cx="7660640" cy="4044613"/>
                 </a:xfrm>
                 <a:prstGeom prst="rect">
                   <a:avLst/>
@@ -27578,7 +26492,7 @@
                 <a:blipFill>
                   <a:blip r:embed="rId2"/>
                   <a:stretch>
-                    <a:fillRect l="-796" t="-1121" b="-3139"/>
+                    <a:fillRect l="-796" t="-754" b="-1961"/>
                   </a:stretch>
                 </a:blipFill>
                 <a:ln>
@@ -27601,8 +26515,8 @@
           </mc:Fallback>
         </mc:AlternateContent>
       </p:grpSp>
-      <mc:AlternateContent xmlns:mc="http://schemas.openxmlformats.org/markup-compatibility/2006">
-        <mc:Choice xmlns:a14="http://schemas.microsoft.com/office/drawing/2010/main" Requires="a14">
+      <mc:AlternateContent xmlns:mc="http://schemas.openxmlformats.org/markup-compatibility/2006" xmlns:a14="http://schemas.microsoft.com/office/drawing/2010/main">
+        <mc:Choice Requires="a14">
           <p:sp>
             <p:nvSpPr>
               <p:cNvPr id="9" name="Rectangle 3">
@@ -27861,7 +26775,7 @@
             </p:txBody>
           </p:sp>
         </mc:Choice>
-        <mc:Fallback>
+        <mc:Fallback xmlns="">
           <p:sp>
             <p:nvSpPr>
               <p:cNvPr id="9" name="Rectangle 3">
@@ -30911,7 +29825,7 @@
             <p:spPr>
               <a:xfrm>
                 <a:off x="457200" y="3035299"/>
-                <a:ext cx="8051800" cy="2493829"/>
+                <a:ext cx="8051800" cy="2912574"/>
               </a:xfrm>
               <a:solidFill>
                 <a:srgbClr val="EEEFD6"/>
@@ -30969,7 +29883,7 @@
                         <m:ctrlPr>
                           <a:rPr lang="en-US" i="1">
                             <a:solidFill>
-                              <a:srgbClr val="FF0000"/>
+                              <a:schemeClr val="tx1"/>
                             </a:solidFill>
                             <a:latin typeface="Cambria Math" panose="02040503050406030204" pitchFamily="18" charset="0"/>
                           </a:rPr>
@@ -30979,7 +29893,7 @@
                         <m:r>
                           <a:rPr lang="en-US" i="1">
                             <a:solidFill>
-                              <a:srgbClr val="FF0000"/>
+                              <a:schemeClr val="tx1"/>
                             </a:solidFill>
                             <a:latin typeface="Cambria Math" panose="02040503050406030204" pitchFamily="18" charset="0"/>
                           </a:rPr>
@@ -30990,7 +29904,7 @@
                         <m:r>
                           <a:rPr lang="en-US" i="1">
                             <a:solidFill>
-                              <a:srgbClr val="FF0000"/>
+                              <a:schemeClr val="tx1"/>
                             </a:solidFill>
                             <a:latin typeface="Cambria Math" panose="02040503050406030204" pitchFamily="18" charset="0"/>
                           </a:rPr>
@@ -31001,36 +29915,18 @@
                     <m:r>
                       <a:rPr lang="en-US" i="1">
                         <a:solidFill>
-                          <a:srgbClr val="FF0000"/>
+                          <a:schemeClr val="tx1"/>
                         </a:solidFill>
                         <a:latin typeface="Cambria Math" panose="02040503050406030204" pitchFamily="18" charset="0"/>
                       </a:rPr>
                       <m:t>=</m:t>
                     </m:r>
-                    <m:r>
-                      <a:rPr lang="en-US" b="0" i="1" smtClean="0">
-                        <a:solidFill>
-                          <a:srgbClr val="FF0000"/>
-                        </a:solidFill>
-                        <a:latin typeface="Cambria Math" panose="02040503050406030204" pitchFamily="18" charset="0"/>
-                      </a:rPr>
-                      <m:t>𝑟</m:t>
-                    </m:r>
-                    <m:r>
-                      <a:rPr lang="en-US" b="0" i="1" smtClean="0">
-                        <a:solidFill>
-                          <a:srgbClr val="FF0000"/>
-                        </a:solidFill>
-                        <a:latin typeface="Cambria Math" panose="02040503050406030204" pitchFamily="18" charset="0"/>
-                      </a:rPr>
-                      <m:t>⋅</m:t>
-                    </m:r>
                     <m:sSub>
                       <m:sSubPr>
                         <m:ctrlPr>
-                          <a:rPr lang="en-US" i="1">
+                          <a:rPr lang="en-US" b="0" i="1" smtClean="0">
                             <a:solidFill>
-                              <a:srgbClr val="FF0000"/>
+                              <a:schemeClr val="tx1"/>
                             </a:solidFill>
                             <a:latin typeface="Cambria Math" panose="02040503050406030204" pitchFamily="18" charset="0"/>
                           </a:rPr>
@@ -31038,20 +29934,38 @@
                       </m:sSubPr>
                       <m:e>
                         <m:r>
-                          <a:rPr lang="en-US" i="1">
+                          <a:rPr lang="en-US" b="0" i="1" smtClean="0">
                             <a:solidFill>
-                              <a:srgbClr val="FF0000"/>
+                              <a:schemeClr val="tx1"/>
                             </a:solidFill>
                             <a:latin typeface="Cambria Math" panose="02040503050406030204" pitchFamily="18" charset="0"/>
                           </a:rPr>
-                          <m:t>𝑠</m:t>
+                          <m:t>𝑟</m:t>
                         </m:r>
                       </m:e>
                       <m:sub>
                         <m:r>
-                          <a:rPr lang="en-US" i="1">
+                          <a:rPr lang="en-US" b="0" i="1" smtClean="0">
                             <a:solidFill>
-                              <a:srgbClr val="FF0000"/>
+                              <a:schemeClr val="tx1"/>
+                            </a:solidFill>
+                            <a:latin typeface="Cambria Math" panose="02040503050406030204" pitchFamily="18" charset="0"/>
+                          </a:rPr>
+                          <m:t>𝑥</m:t>
+                        </m:r>
+                        <m:r>
+                          <a:rPr lang="en-US" b="0" i="1" smtClean="0">
+                            <a:solidFill>
+                              <a:schemeClr val="tx1"/>
+                            </a:solidFill>
+                            <a:latin typeface="Cambria Math" panose="02040503050406030204" pitchFamily="18" charset="0"/>
+                          </a:rPr>
+                          <m:t>,</m:t>
+                        </m:r>
+                        <m:r>
+                          <a:rPr lang="en-US" b="0" i="1" smtClean="0">
+                            <a:solidFill>
+                              <a:schemeClr val="tx1"/>
                             </a:solidFill>
                             <a:latin typeface="Cambria Math" panose="02040503050406030204" pitchFamily="18" charset="0"/>
                           </a:rPr>
@@ -31062,46 +29976,96 @@
                     <m:r>
                       <a:rPr lang="en-US" b="0" i="1" smtClean="0">
                         <a:solidFill>
-                          <a:srgbClr val="FF0000"/>
+                          <a:schemeClr val="tx1"/>
                         </a:solidFill>
                         <a:latin typeface="Cambria Math" panose="02040503050406030204" pitchFamily="18" charset="0"/>
                       </a:rPr>
-                      <m:t>/</m:t>
+                      <m:t>⋅</m:t>
                     </m:r>
-                    <m:sSub>
-                      <m:sSubPr>
+                    <m:f>
+                      <m:fPr>
                         <m:ctrlPr>
-                          <a:rPr lang="en-US" b="0" i="1" smtClean="0">
+                          <a:rPr lang="en-US" i="1">
                             <a:solidFill>
-                              <a:srgbClr val="FF0000"/>
+                              <a:schemeClr val="tx1"/>
                             </a:solidFill>
                             <a:latin typeface="Cambria Math" panose="02040503050406030204" pitchFamily="18" charset="0"/>
                           </a:rPr>
                         </m:ctrlPr>
-                      </m:sSubPr>
-                      <m:e>
-                        <m:r>
-                          <a:rPr lang="en-US" b="0" i="1" smtClean="0">
-                            <a:solidFill>
-                              <a:srgbClr val="FF0000"/>
-                            </a:solidFill>
-                            <a:latin typeface="Cambria Math" panose="02040503050406030204" pitchFamily="18" charset="0"/>
-                          </a:rPr>
-                          <m:t>𝑠</m:t>
-                        </m:r>
-                      </m:e>
-                      <m:sub>
-                        <m:r>
-                          <a:rPr lang="en-US" b="0" i="1" smtClean="0">
-                            <a:solidFill>
-                              <a:srgbClr val="FF0000"/>
-                            </a:solidFill>
-                            <a:latin typeface="Cambria Math" panose="02040503050406030204" pitchFamily="18" charset="0"/>
-                          </a:rPr>
-                          <m:t>𝑥</m:t>
-                        </m:r>
-                      </m:sub>
-                    </m:sSub>
+                      </m:fPr>
+                      <m:num>
+                        <m:sSub>
+                          <m:sSubPr>
+                            <m:ctrlPr>
+                              <a:rPr lang="en-US" i="1">
+                                <a:solidFill>
+                                  <a:schemeClr val="tx1"/>
+                                </a:solidFill>
+                                <a:latin typeface="Cambria Math" panose="02040503050406030204" pitchFamily="18" charset="0"/>
+                              </a:rPr>
+                            </m:ctrlPr>
+                          </m:sSubPr>
+                          <m:e>
+                            <m:r>
+                              <a:rPr lang="en-US" i="1">
+                                <a:solidFill>
+                                  <a:schemeClr val="tx1"/>
+                                </a:solidFill>
+                                <a:latin typeface="Cambria Math" panose="02040503050406030204" pitchFamily="18" charset="0"/>
+                              </a:rPr>
+                              <m:t>𝑠</m:t>
+                            </m:r>
+                          </m:e>
+                          <m:sub>
+                            <m:r>
+                              <a:rPr lang="en-US" i="1">
+                                <a:solidFill>
+                                  <a:schemeClr val="tx1"/>
+                                </a:solidFill>
+                                <a:latin typeface="Cambria Math" panose="02040503050406030204" pitchFamily="18" charset="0"/>
+                              </a:rPr>
+                              <m:t>𝑦</m:t>
+                            </m:r>
+                          </m:sub>
+                        </m:sSub>
+                      </m:num>
+                      <m:den>
+                        <m:sSub>
+                          <m:sSubPr>
+                            <m:ctrlPr>
+                              <a:rPr lang="en-US" b="0" i="1" smtClean="0">
+                                <a:solidFill>
+                                  <a:schemeClr val="tx1"/>
+                                </a:solidFill>
+                                <a:latin typeface="Cambria Math" panose="02040503050406030204" pitchFamily="18" charset="0"/>
+                              </a:rPr>
+                            </m:ctrlPr>
+                          </m:sSubPr>
+                          <m:e>
+                            <m:r>
+                              <a:rPr lang="en-US" b="0" i="1" smtClean="0">
+                                <a:solidFill>
+                                  <a:schemeClr val="tx1"/>
+                                </a:solidFill>
+                                <a:latin typeface="Cambria Math" panose="02040503050406030204" pitchFamily="18" charset="0"/>
+                              </a:rPr>
+                              <m:t>𝑠</m:t>
+                            </m:r>
+                          </m:e>
+                          <m:sub>
+                            <m:r>
+                              <a:rPr lang="en-US" b="0" i="1" smtClean="0">
+                                <a:solidFill>
+                                  <a:schemeClr val="tx1"/>
+                                </a:solidFill>
+                                <a:latin typeface="Cambria Math" panose="02040503050406030204" pitchFamily="18" charset="0"/>
+                              </a:rPr>
+                              <m:t>𝑥</m:t>
+                            </m:r>
+                          </m:sub>
+                        </m:sSub>
+                      </m:den>
+                    </m:f>
                   </m:oMath>
                 </a14:m>
                 <a:r>
@@ -31228,7 +30192,155 @@
                     <a:ea typeface="ＭＳ Ｐゴシック" pitchFamily="-65" charset="-128"/>
                     <a:cs typeface="Arial" charset="0"/>
                   </a:rPr>
-                  <a:t>The LS regression line always passes through the point (</a:t>
+                  <a:t>The intercept </a:t>
+                </a:r>
+                <a14:m>
+                  <m:oMath xmlns:m="http://schemas.openxmlformats.org/officeDocument/2006/math">
+                    <m:sSub>
+                      <m:sSubPr>
+                        <m:ctrlPr>
+                          <a:rPr lang="en-US" i="1">
+                            <a:solidFill>
+                              <a:schemeClr val="tx1"/>
+                            </a:solidFill>
+                            <a:latin typeface="Cambria Math" panose="02040503050406030204" pitchFamily="18" charset="0"/>
+                          </a:rPr>
+                        </m:ctrlPr>
+                      </m:sSubPr>
+                      <m:e>
+                        <m:r>
+                          <a:rPr lang="en-US" i="1">
+                            <a:solidFill>
+                              <a:schemeClr val="tx1"/>
+                            </a:solidFill>
+                            <a:latin typeface="Cambria Math" panose="02040503050406030204" pitchFamily="18" charset="0"/>
+                          </a:rPr>
+                          <m:t>𝑏</m:t>
+                        </m:r>
+                      </m:e>
+                      <m:sub>
+                        <m:r>
+                          <a:rPr lang="en-US" b="0" i="1" smtClean="0">
+                            <a:solidFill>
+                              <a:schemeClr val="tx1"/>
+                            </a:solidFill>
+                            <a:latin typeface="Cambria Math" panose="02040503050406030204" pitchFamily="18" charset="0"/>
+                          </a:rPr>
+                          <m:t>0</m:t>
+                        </m:r>
+                      </m:sub>
+                    </m:sSub>
+                    <m:r>
+                      <a:rPr lang="en-US" i="1">
+                        <a:solidFill>
+                          <a:schemeClr val="tx1"/>
+                        </a:solidFill>
+                        <a:latin typeface="Cambria Math" panose="02040503050406030204" pitchFamily="18" charset="0"/>
+                      </a:rPr>
+                      <m:t>=</m:t>
+                    </m:r>
+                    <m:acc>
+                      <m:accPr>
+                        <m:chr m:val="̅"/>
+                        <m:ctrlPr>
+                          <a:rPr lang="en-US" b="0" i="1" smtClean="0">
+                            <a:solidFill>
+                              <a:schemeClr val="tx1"/>
+                            </a:solidFill>
+                            <a:latin typeface="Cambria Math" panose="02040503050406030204" pitchFamily="18" charset="0"/>
+                          </a:rPr>
+                        </m:ctrlPr>
+                      </m:accPr>
+                      <m:e>
+                        <m:r>
+                          <a:rPr lang="en-US" b="0" i="1" smtClean="0">
+                            <a:solidFill>
+                              <a:schemeClr val="tx1"/>
+                            </a:solidFill>
+                            <a:latin typeface="Cambria Math" panose="02040503050406030204" pitchFamily="18" charset="0"/>
+                          </a:rPr>
+                          <m:t>𝑦</m:t>
+                        </m:r>
+                      </m:e>
+                    </m:acc>
+                    <m:r>
+                      <a:rPr lang="en-US" b="0" i="1" smtClean="0">
+                        <a:solidFill>
+                          <a:schemeClr val="tx1"/>
+                        </a:solidFill>
+                        <a:latin typeface="Cambria Math" panose="02040503050406030204" pitchFamily="18" charset="0"/>
+                      </a:rPr>
+                      <m:t>−</m:t>
+                    </m:r>
+                    <m:sSub>
+                      <m:sSubPr>
+                        <m:ctrlPr>
+                          <a:rPr lang="en-US" b="0" i="1" smtClean="0">
+                            <a:solidFill>
+                              <a:schemeClr val="tx1"/>
+                            </a:solidFill>
+                            <a:latin typeface="Cambria Math" panose="02040503050406030204" pitchFamily="18" charset="0"/>
+                          </a:rPr>
+                        </m:ctrlPr>
+                      </m:sSubPr>
+                      <m:e>
+                        <m:r>
+                          <a:rPr lang="en-US" b="0" i="1" smtClean="0">
+                            <a:solidFill>
+                              <a:schemeClr val="tx1"/>
+                            </a:solidFill>
+                            <a:latin typeface="Cambria Math" panose="02040503050406030204" pitchFamily="18" charset="0"/>
+                          </a:rPr>
+                          <m:t>𝑏</m:t>
+                        </m:r>
+                      </m:e>
+                      <m:sub>
+                        <m:r>
+                          <a:rPr lang="en-US" b="0" i="1" smtClean="0">
+                            <a:solidFill>
+                              <a:schemeClr val="tx1"/>
+                            </a:solidFill>
+                            <a:latin typeface="Cambria Math" panose="02040503050406030204" pitchFamily="18" charset="0"/>
+                          </a:rPr>
+                          <m:t>1</m:t>
+                        </m:r>
+                      </m:sub>
+                    </m:sSub>
+                    <m:acc>
+                      <m:accPr>
+                        <m:chr m:val="̅"/>
+                        <m:ctrlPr>
+                          <a:rPr lang="en-US" b="0" i="1" smtClean="0">
+                            <a:solidFill>
+                              <a:schemeClr val="tx1"/>
+                            </a:solidFill>
+                            <a:latin typeface="Cambria Math" panose="02040503050406030204" pitchFamily="18" charset="0"/>
+                          </a:rPr>
+                        </m:ctrlPr>
+                      </m:accPr>
+                      <m:e>
+                        <m:r>
+                          <a:rPr lang="en-US" b="0" i="1" smtClean="0">
+                            <a:solidFill>
+                              <a:schemeClr val="tx1"/>
+                            </a:solidFill>
+                            <a:latin typeface="Cambria Math" panose="02040503050406030204" pitchFamily="18" charset="0"/>
+                          </a:rPr>
+                          <m:t>𝑥</m:t>
+                        </m:r>
+                      </m:e>
+                    </m:acc>
+                  </m:oMath>
+                </a14:m>
+                <a:r>
+                  <a:rPr lang="en-US" altLang="en-US" dirty="0">
+                    <a:solidFill>
+                      <a:srgbClr val="000000"/>
+                    </a:solidFill>
+                    <a:ea typeface="ＭＳ Ｐゴシック" pitchFamily="-65" charset="-128"/>
+                    <a:cs typeface="Arial" charset="0"/>
+                  </a:rPr>
+                  <a:t>. The LS regression line always passes through the point (</a:t>
                 </a:r>
                 <a14:m>
                   <m:oMath xmlns:m="http://schemas.openxmlformats.org/officeDocument/2006/math">
@@ -31236,27 +30348,23 @@
                       <m:accPr>
                         <m:chr m:val="̅"/>
                         <m:ctrlPr>
-                          <a:rPr lang="en-US" altLang="en-US" b="1" i="1" smtClean="0">
+                          <a:rPr lang="en-US" b="0" i="1" smtClean="0">
                             <a:solidFill>
                               <a:srgbClr val="FF0000"/>
                             </a:solidFill>
                             <a:latin typeface="Cambria Math" panose="02040503050406030204" pitchFamily="18" charset="0"/>
-                            <a:ea typeface="ＭＳ Ｐゴシック" pitchFamily="-65" charset="-128"/>
-                            <a:cs typeface="Arial" charset="0"/>
                           </a:rPr>
                         </m:ctrlPr>
                       </m:accPr>
                       <m:e>
                         <m:r>
-                          <a:rPr lang="en-US" altLang="en-US" b="1" i="1" smtClean="0">
+                          <a:rPr lang="en-US" b="0" i="1" smtClean="0">
                             <a:solidFill>
                               <a:srgbClr val="FF0000"/>
                             </a:solidFill>
                             <a:latin typeface="Cambria Math" panose="02040503050406030204" pitchFamily="18" charset="0"/>
-                            <a:ea typeface="ＭＳ Ｐゴシック" pitchFamily="-65" charset="-128"/>
-                            <a:cs typeface="Arial" charset="0"/>
                           </a:rPr>
-                          <m:t>𝒙</m:t>
+                          <m:t>𝑥</m:t>
                         </m:r>
                       </m:e>
                     </m:acc>
@@ -31270,7 +30378,15 @@
                     <a:ea typeface="ＭＳ Ｐゴシック" pitchFamily="-65" charset="-128"/>
                     <a:cs typeface="Arial" charset="0"/>
                   </a:rPr>
-                  <a:t>, </a:t>
+                  <a:t>,</a:t>
+                </a:r>
+                <a:r>
+                  <a:rPr lang="en-US" dirty="0">
+                    <a:solidFill>
+                      <a:srgbClr val="FF0000"/>
+                    </a:solidFill>
+                  </a:rPr>
+                  <a:t> </a:t>
                 </a:r>
                 <a14:m>
                   <m:oMath xmlns:m="http://schemas.openxmlformats.org/officeDocument/2006/math">
@@ -31278,27 +30394,23 @@
                       <m:accPr>
                         <m:chr m:val="̅"/>
                         <m:ctrlPr>
-                          <a:rPr lang="en-US" altLang="en-US" b="1" i="1" smtClean="0">
+                          <a:rPr lang="en-US" i="1">
                             <a:solidFill>
                               <a:srgbClr val="FF0000"/>
                             </a:solidFill>
                             <a:latin typeface="Cambria Math" panose="02040503050406030204" pitchFamily="18" charset="0"/>
-                            <a:ea typeface="ＭＳ Ｐゴシック" pitchFamily="-65" charset="-128"/>
-                            <a:cs typeface="Arial" charset="0"/>
                           </a:rPr>
                         </m:ctrlPr>
                       </m:accPr>
                       <m:e>
                         <m:r>
-                          <a:rPr lang="en-US" altLang="en-US" b="1" i="1" smtClean="0">
+                          <a:rPr lang="en-US" i="1">
                             <a:solidFill>
                               <a:srgbClr val="FF0000"/>
                             </a:solidFill>
                             <a:latin typeface="Cambria Math" panose="02040503050406030204" pitchFamily="18" charset="0"/>
-                            <a:ea typeface="ＭＳ Ｐゴシック" pitchFamily="-65" charset="-128"/>
-                            <a:cs typeface="Arial" charset="0"/>
                           </a:rPr>
-                          <m:t>𝒚</m:t>
+                          <m:t>𝑦</m:t>
                         </m:r>
                       </m:e>
                     </m:acc>
@@ -31368,7 +30480,7 @@
             <p:spPr>
               <a:xfrm>
                 <a:off x="457200" y="3035299"/>
-                <a:ext cx="8051800" cy="2493829"/>
+                <a:ext cx="8051800" cy="2912574"/>
               </a:xfrm>
               <a:blipFill>
                 <a:blip r:embed="rId3"/>
